--- a/class/cloud_infra_mgmt/01주차_클라우드개념_Docker입문/01_강의자료/1차시_클라우드패러다임과가상화이론.pptx
+++ b/class/cloud_infra_mgmt/01주차_클라우드개념_Docker입문/01_강의자료/1차시_클라우드패러다임과가상화이론.pptx
@@ -12348,7 +12348,7 @@
               </a:lnSpc>
             </a:pPr>
             <a:r>
-              <a:rPr sz="1500" b="1">
+              <a:rPr sz="1700" b="1">
                 <a:solidFill>
                   <a:srgbClr val="0D9488"/>
                 </a:solidFill>
@@ -12357,7 +12357,7 @@
               <a:t>●  </a:t>
             </a:r>
             <a:r>
-              <a:rPr sz="1500" b="0">
+              <a:rPr sz="1700" b="0">
                 <a:solidFill>
                   <a:srgbClr val="222733"/>
                 </a:solidFill>
@@ -12373,7 +12373,7 @@
               </a:lnSpc>
             </a:pPr>
             <a:r>
-              <a:rPr sz="1500" b="1">
+              <a:rPr sz="1700" b="1">
                 <a:solidFill>
                   <a:srgbClr val="0D9488"/>
                 </a:solidFill>
@@ -12382,7 +12382,7 @@
               <a:t>●  </a:t>
             </a:r>
             <a:r>
-              <a:rPr sz="1500" b="0">
+              <a:rPr sz="1700" b="0">
                 <a:solidFill>
                   <a:srgbClr val="222733"/>
                 </a:solidFill>
@@ -12398,7 +12398,7 @@
               </a:lnSpc>
             </a:pPr>
             <a:r>
-              <a:rPr sz="1500" b="1">
+              <a:rPr sz="1700" b="1">
                 <a:solidFill>
                   <a:srgbClr val="0D9488"/>
                 </a:solidFill>
@@ -12407,7 +12407,7 @@
               <a:t>●  </a:t>
             </a:r>
             <a:r>
-              <a:rPr sz="1500" b="0">
+              <a:rPr sz="1700" b="0">
                 <a:solidFill>
                   <a:srgbClr val="222733"/>
                 </a:solidFill>

--- a/class/cloud_infra_mgmt/01주차_클라우드개념_Docker입문/01_강의자료/1차시_클라우드패러다임과가상화이론.pptx
+++ b/class/cloud_infra_mgmt/01주차_클라우드개념_Docker입문/01_강의자료/1차시_클라우드패러다임과가상화이론.pptx
@@ -5454,7 +5454,7 @@
           <a:p>
             <a:pPr>
               <a:lnSpc>
-                <a:spcPct val="115000"/>
+                <a:spcPct val="149500"/>
               </a:lnSpc>
             </a:pPr>
             <a:r>
@@ -5467,19 +5467,28 @@
               <a:t>●  </a:t>
             </a:r>
             <a:r>
+              <a:rPr sz="1700" b="1">
+                <a:solidFill>
+                  <a:srgbClr val="0D9488"/>
+                </a:solidFill>
+                <a:latin typeface="맑은 고딕"/>
+              </a:rPr>
+              <a:t>무겁다</a:t>
+            </a:r>
+            <a:r>
               <a:rPr sz="1700" b="0">
                 <a:solidFill>
                   <a:srgbClr val="222733"/>
                 </a:solidFill>
                 <a:latin typeface="맑은 고딕"/>
               </a:rPr>
-              <a:t>무겁다 – VM마다 완전한 OS 포함 → 용량 수 GB~수십 GB</a:t>
+              <a:t> – VM마다 완전한 OS 포함 → 용량 수 GB~수십 GB</a:t>
             </a:r>
           </a:p>
           <a:p>
             <a:pPr>
               <a:lnSpc>
-                <a:spcPct val="115000"/>
+                <a:spcPct val="149500"/>
               </a:lnSpc>
             </a:pPr>
             <a:r>
@@ -5492,19 +5501,28 @@
               <a:t>●  </a:t>
             </a:r>
             <a:r>
+              <a:rPr sz="1700" b="1">
+                <a:solidFill>
+                  <a:srgbClr val="0D9488"/>
+                </a:solidFill>
+                <a:latin typeface="맑은 고딕"/>
+              </a:rPr>
+              <a:t>느리다</a:t>
+            </a:r>
+            <a:r>
               <a:rPr sz="1700" b="0">
                 <a:solidFill>
                   <a:srgbClr val="222733"/>
                 </a:solidFill>
                 <a:latin typeface="맑은 고딕"/>
               </a:rPr>
-              <a:t>느리다 – OS 부팅 필요 → 수십 초~수 분 소요</a:t>
+              <a:t> – OS 부팅 필요 → 수십 초~수 분 소요</a:t>
             </a:r>
           </a:p>
           <a:p>
             <a:pPr>
               <a:lnSpc>
-                <a:spcPct val="115000"/>
+                <a:spcPct val="149500"/>
               </a:lnSpc>
             </a:pPr>
             <a:r>
@@ -5517,13 +5535,22 @@
               <a:t>●  </a:t>
             </a:r>
             <a:r>
+              <a:rPr sz="1700" b="1">
+                <a:solidFill>
+                  <a:srgbClr val="0D9488"/>
+                </a:solidFill>
+                <a:latin typeface="맑은 고딕"/>
+              </a:rPr>
+              <a:t>낭비된다</a:t>
+            </a:r>
+            <a:r>
               <a:rPr sz="1700" b="0">
                 <a:solidFill>
                   <a:srgbClr val="222733"/>
                 </a:solidFill>
                 <a:latin typeface="맑은 고딕"/>
               </a:rPr>
-              <a:t>낭비된다 – 여러 VM 동시 실행 시 CPU/메모리 중복 소모</a:t>
+              <a:t> – 여러 VM 동시 실행 시 CPU/메모리 중복 소모</a:t>
             </a:r>
           </a:p>
         </p:txBody>
@@ -6021,7 +6048,7 @@
           <a:p>
             <a:pPr>
               <a:lnSpc>
-                <a:spcPct val="115000"/>
+                <a:spcPct val="149500"/>
               </a:lnSpc>
             </a:pPr>
             <a:r>
@@ -6040,38 +6067,56 @@
                 </a:solidFill>
                 <a:latin typeface="맑은 고딕"/>
               </a:rPr>
-              <a:t>브라우저에서 바로 실습, 설치 불필요</a:t>
+              <a:t>브라우저에서 바로 실습, </a:t>
+            </a:r>
+            <a:r>
+              <a:rPr sz="1700" b="1">
+                <a:solidFill>
+                  <a:srgbClr val="0D9488"/>
+                </a:solidFill>
+                <a:latin typeface="맑은 고딕"/>
+              </a:rPr>
+              <a:t>설치 불필요</a:t>
             </a:r>
           </a:p>
           <a:p>
             <a:pPr>
               <a:lnSpc>
-                <a:spcPct val="115000"/>
+                <a:spcPct val="149500"/>
               </a:lnSpc>
             </a:pPr>
             <a:r>
               <a:rPr sz="1700" b="1">
                 <a:solidFill>
-                  <a:srgbClr val="0D9488"/>
+                  <a:srgbClr val="DC2626"/>
                 </a:solidFill>
                 <a:latin typeface="맑은 고딕"/>
               </a:rPr>
               <a:t>●  </a:t>
             </a:r>
             <a:r>
+              <a:rPr sz="1700" b="1">
+                <a:solidFill>
+                  <a:srgbClr val="DC2626"/>
+                </a:solidFill>
+                <a:latin typeface="맑은 고딕"/>
+              </a:rPr>
+              <a:t>60분 시간 제한</a:t>
+            </a:r>
+            <a:r>
               <a:rPr sz="1700" b="0">
                 <a:solidFill>
                   <a:srgbClr val="222733"/>
                 </a:solidFill>
                 <a:latin typeface="맑은 고딕"/>
               </a:rPr>
-              <a:t>⚠ 60분 시간 제한 있음 (초기화돼도 로컬 VM에서 이어가면 OK)</a:t>
+              <a:t>이 있음 (초기화돼도 로컬 VM에서 이어가면 OK)</a:t>
             </a:r>
           </a:p>
           <a:p>
             <a:pPr>
               <a:lnSpc>
-                <a:spcPct val="115000"/>
+                <a:spcPct val="149500"/>
               </a:lnSpc>
             </a:pPr>
             <a:r>
@@ -6096,7 +6141,7 @@
           <a:p>
             <a:pPr>
               <a:lnSpc>
-                <a:spcPct val="115000"/>
+                <a:spcPct val="149500"/>
               </a:lnSpc>
             </a:pPr>
             <a:r>
@@ -6115,7 +6160,25 @@
                 </a:solidFill>
                 <a:latin typeface="맑은 고딕"/>
               </a:rPr>
-              <a:t>→ 이 터미널도, 여러분의 로컬 VM도 모두 오늘 배운 가상화 기술의 결과물입니다</a:t>
+              <a:t>→ 이 터미널도, 여러분의 로컬 VM도 모두 오늘 배운 </a:t>
+            </a:r>
+            <a:r>
+              <a:rPr sz="1700" b="1">
+                <a:solidFill>
+                  <a:srgbClr val="0D9488"/>
+                </a:solidFill>
+                <a:latin typeface="맑은 고딕"/>
+              </a:rPr>
+              <a:t>가상화 기술의 결과물</a:t>
+            </a:r>
+            <a:r>
+              <a:rPr sz="1700" b="0">
+                <a:solidFill>
+                  <a:srgbClr val="222733"/>
+                </a:solidFill>
+                <a:latin typeface="맑은 고딕"/>
+              </a:rPr>
+              <a:t>입니다</a:t>
             </a:r>
           </a:p>
         </p:txBody>
@@ -6487,7 +6550,7 @@
           <a:p>
             <a:pPr>
               <a:lnSpc>
-                <a:spcPct val="115000"/>
+                <a:spcPct val="149500"/>
               </a:lnSpc>
             </a:pPr>
             <a:r>
@@ -6506,13 +6569,22 @@
                 </a:solidFill>
                 <a:latin typeface="맑은 고딕"/>
               </a:rPr>
-              <a:t>0주차에 배포받은 개인 VM(cloud-lab) 로그인 상태 확인</a:t>
+              <a:t>0주차에 배포받은 개인 VM(cloud-lab) </a:t>
+            </a:r>
+            <a:r>
+              <a:rPr sz="1700" b="1">
+                <a:solidFill>
+                  <a:srgbClr val="0D9488"/>
+                </a:solidFill>
+                <a:latin typeface="맑은 고딕"/>
+              </a:rPr>
+              <a:t>로그인 상태 확인</a:t>
             </a:r>
           </a:p>
           <a:p>
             <a:pPr>
               <a:lnSpc>
-                <a:spcPct val="115000"/>
+                <a:spcPct val="149500"/>
               </a:lnSpc>
             </a:pPr>
             <a:r>
@@ -6537,7 +6609,7 @@
           <a:p>
             <a:pPr>
               <a:lnSpc>
-                <a:spcPct val="115000"/>
+                <a:spcPct val="149500"/>
               </a:lnSpc>
             </a:pPr>
             <a:r>
@@ -6562,7 +6634,7 @@
           <a:p>
             <a:pPr>
               <a:lnSpc>
-                <a:spcPct val="115000"/>
+                <a:spcPct val="149500"/>
               </a:lnSpc>
             </a:pPr>
             <a:r>
@@ -6575,13 +6647,22 @@
               <a:t>●  </a:t>
             </a:r>
             <a:r>
+              <a:rPr sz="1700" b="1">
+                <a:solidFill>
+                  <a:srgbClr val="0D9488"/>
+                </a:solidFill>
+                <a:latin typeface="맑은 고딕"/>
+              </a:rPr>
+              <a:t>문제 발생 시</a:t>
+            </a:r>
+            <a:r>
               <a:rPr sz="1700" b="0">
                 <a:solidFill>
                   <a:srgbClr val="222733"/>
                 </a:solidFill>
                 <a:latin typeface="맑은 고딕"/>
               </a:rPr>
-              <a:t>문제 발생 시 → 06_로컬VM_과제복습 / 07_오류FAQ 참고</a:t>
+              <a:t> → 06_로컬VM_과제복습 / 07_오류FAQ 참고</a:t>
             </a:r>
           </a:p>
         </p:txBody>
@@ -7438,7 +7519,25 @@
                 </a:solidFill>
                 <a:latin typeface="맑은 고딕"/>
               </a:rPr>
-              <a:t>1.  클라우드 vs 온프레미스, 무엇이 다른가</a:t>
+              <a:t>1.  </a:t>
+            </a:r>
+            <a:r>
+              <a:rPr sz="2000" b="1">
+                <a:solidFill>
+                  <a:srgbClr val="0D9488"/>
+                </a:solidFill>
+                <a:latin typeface="맑은 고딕"/>
+              </a:rPr>
+              <a:t>클라우드 vs 온프레미스</a:t>
+            </a:r>
+            <a:r>
+              <a:rPr sz="2000" b="0">
+                <a:solidFill>
+                  <a:srgbClr val="222733"/>
+                </a:solidFill>
+                <a:latin typeface="맑은 고딕"/>
+              </a:rPr>
+              <a:t>, 무엇이 다른가</a:t>
             </a:r>
           </a:p>
           <a:p>
@@ -7454,7 +7553,25 @@
                 </a:solidFill>
                 <a:latin typeface="맑은 고딕"/>
               </a:rPr>
-              <a:t>2.  가상화(Virtualization)가 왜 필요했고, 어떤 한계가 있는가</a:t>
+              <a:t>2.  </a:t>
+            </a:r>
+            <a:r>
+              <a:rPr sz="2000" b="1">
+                <a:solidFill>
+                  <a:srgbClr val="0D9488"/>
+                </a:solidFill>
+                <a:latin typeface="맑은 고딕"/>
+              </a:rPr>
+              <a:t>가상화(Virtualization)</a:t>
+            </a:r>
+            <a:r>
+              <a:rPr sz="2000" b="0">
+                <a:solidFill>
+                  <a:srgbClr val="222733"/>
+                </a:solidFill>
+                <a:latin typeface="맑은 고딕"/>
+              </a:rPr>
+              <a:t>가 왜 필요했고, 어떤 한계가 있는가</a:t>
             </a:r>
           </a:p>
         </p:txBody>
@@ -7795,16 +7912,104 @@
       </p:sp>
       <p:sp>
         <p:nvSpPr>
-          <p:cNvPr id="7" name="Isosceles Triangle 6"/>
+          <p:cNvPr id="7" name="Rectangle 6"/>
           <p:cNvSpPr/>
           <p:nvPr/>
         </p:nvSpPr>
         <p:spPr>
-          <a:xfrm rot="5400000">
-            <a:off x="3495751" y="1673352"/>
-            <a:ext cx="146304" cy="146304"/>
-          </a:xfrm>
-          <a:prstGeom prst="triangle">
+          <a:xfrm>
+            <a:off x="5096865" y="1730959"/>
+            <a:ext cx="1995220" cy="31089"/>
+          </a:xfrm>
+          <a:prstGeom prst="rect">
+            <a:avLst/>
+          </a:prstGeom>
+          <a:solidFill>
+            <a:srgbClr val="14B8A6"/>
+          </a:solidFill>
+          <a:ln>
+            <a:noFill/>
+          </a:ln>
+          <a:effectLst/>
+        </p:spPr>
+        <p:style>
+          <a:lnRef idx="1">
+            <a:schemeClr val="accent1"/>
+          </a:lnRef>
+          <a:fillRef idx="3">
+            <a:schemeClr val="accent1"/>
+          </a:fillRef>
+          <a:effectRef idx="2">
+            <a:schemeClr val="accent1"/>
+          </a:effectRef>
+          <a:fontRef idx="minor">
+            <a:schemeClr val="lt1"/>
+          </a:fontRef>
+        </p:style>
+        <p:txBody>
+          <a:bodyPr rtlCol="0" anchor="ctr"/>
+          <a:lstStyle/>
+          <a:p>
+            <a:pPr algn="ctr"/>
+          </a:p>
+        </p:txBody>
+      </p:sp>
+      <p:sp>
+        <p:nvSpPr>
+          <p:cNvPr id="8" name="Rectangle 7"/>
+          <p:cNvSpPr/>
+          <p:nvPr/>
+        </p:nvSpPr>
+        <p:spPr>
+          <a:xfrm>
+            <a:off x="7622438" y="1730959"/>
+            <a:ext cx="1995220" cy="31089"/>
+          </a:xfrm>
+          <a:prstGeom prst="rect">
+            <a:avLst/>
+          </a:prstGeom>
+          <a:solidFill>
+            <a:srgbClr val="14B8A6"/>
+          </a:solidFill>
+          <a:ln>
+            <a:noFill/>
+          </a:ln>
+          <a:effectLst/>
+        </p:spPr>
+        <p:style>
+          <a:lnRef idx="1">
+            <a:schemeClr val="accent1"/>
+          </a:lnRef>
+          <a:fillRef idx="3">
+            <a:schemeClr val="accent1"/>
+          </a:fillRef>
+          <a:effectRef idx="2">
+            <a:schemeClr val="accent1"/>
+          </a:effectRef>
+          <a:fontRef idx="minor">
+            <a:schemeClr val="lt1"/>
+          </a:fontRef>
+        </p:style>
+        <p:txBody>
+          <a:bodyPr rtlCol="0" anchor="ctr"/>
+          <a:lstStyle/>
+          <a:p>
+            <a:pPr algn="ctr"/>
+          </a:p>
+        </p:txBody>
+      </p:sp>
+      <p:sp>
+        <p:nvSpPr>
+          <p:cNvPr id="9" name="Oval 8"/>
+          <p:cNvSpPr/>
+          <p:nvPr/>
+        </p:nvSpPr>
+        <p:spPr>
+          <a:xfrm>
+            <a:off x="2040940" y="1481328"/>
+            <a:ext cx="530352" cy="530352"/>
+          </a:xfrm>
+          <a:prstGeom prst="ellipse">
             <a:avLst/>
           </a:prstGeom>
           <a:solidFill>
@@ -7839,227 +8044,7 @@
       </p:sp>
       <p:sp>
         <p:nvSpPr>
-          <p:cNvPr id="8" name="Rectangle 7"/>
-          <p:cNvSpPr/>
-          <p:nvPr/>
-        </p:nvSpPr>
-        <p:spPr>
-          <a:xfrm>
-            <a:off x="5096865" y="1730959"/>
-            <a:ext cx="1995220" cy="31089"/>
-          </a:xfrm>
-          <a:prstGeom prst="rect">
-            <a:avLst/>
-          </a:prstGeom>
-          <a:solidFill>
-            <a:srgbClr val="14B8A6"/>
-          </a:solidFill>
-          <a:ln>
-            <a:noFill/>
-          </a:ln>
-          <a:effectLst/>
-        </p:spPr>
-        <p:style>
-          <a:lnRef idx="1">
-            <a:schemeClr val="accent1"/>
-          </a:lnRef>
-          <a:fillRef idx="3">
-            <a:schemeClr val="accent1"/>
-          </a:fillRef>
-          <a:effectRef idx="2">
-            <a:schemeClr val="accent1"/>
-          </a:effectRef>
-          <a:fontRef idx="minor">
-            <a:schemeClr val="lt1"/>
-          </a:fontRef>
-        </p:style>
-        <p:txBody>
-          <a:bodyPr rtlCol="0" anchor="ctr"/>
-          <a:lstStyle/>
-          <a:p>
-            <a:pPr algn="ctr"/>
-          </a:p>
-        </p:txBody>
-      </p:sp>
-      <p:sp>
-        <p:nvSpPr>
-          <p:cNvPr id="9" name="Isosceles Triangle 8"/>
-          <p:cNvSpPr/>
-          <p:nvPr/>
-        </p:nvSpPr>
-        <p:spPr>
-          <a:xfrm rot="5400000">
-            <a:off x="6021324" y="1673352"/>
-            <a:ext cx="146304" cy="146304"/>
-          </a:xfrm>
-          <a:prstGeom prst="triangle">
-            <a:avLst/>
-          </a:prstGeom>
-          <a:solidFill>
-            <a:srgbClr val="0D9488"/>
-          </a:solidFill>
-          <a:ln>
-            <a:noFill/>
-          </a:ln>
-          <a:effectLst/>
-        </p:spPr>
-        <p:style>
-          <a:lnRef idx="1">
-            <a:schemeClr val="accent1"/>
-          </a:lnRef>
-          <a:fillRef idx="3">
-            <a:schemeClr val="accent1"/>
-          </a:fillRef>
-          <a:effectRef idx="2">
-            <a:schemeClr val="accent1"/>
-          </a:effectRef>
-          <a:fontRef idx="minor">
-            <a:schemeClr val="lt1"/>
-          </a:fontRef>
-        </p:style>
-        <p:txBody>
-          <a:bodyPr rtlCol="0" anchor="ctr"/>
-          <a:lstStyle/>
-          <a:p>
-            <a:pPr algn="ctr"/>
-          </a:p>
-        </p:txBody>
-      </p:sp>
-      <p:sp>
-        <p:nvSpPr>
-          <p:cNvPr id="10" name="Rectangle 9"/>
-          <p:cNvSpPr/>
-          <p:nvPr/>
-        </p:nvSpPr>
-        <p:spPr>
-          <a:xfrm>
-            <a:off x="7622438" y="1730959"/>
-            <a:ext cx="1995220" cy="31089"/>
-          </a:xfrm>
-          <a:prstGeom prst="rect">
-            <a:avLst/>
-          </a:prstGeom>
-          <a:solidFill>
-            <a:srgbClr val="14B8A6"/>
-          </a:solidFill>
-          <a:ln>
-            <a:noFill/>
-          </a:ln>
-          <a:effectLst/>
-        </p:spPr>
-        <p:style>
-          <a:lnRef idx="1">
-            <a:schemeClr val="accent1"/>
-          </a:lnRef>
-          <a:fillRef idx="3">
-            <a:schemeClr val="accent1"/>
-          </a:fillRef>
-          <a:effectRef idx="2">
-            <a:schemeClr val="accent1"/>
-          </a:effectRef>
-          <a:fontRef idx="minor">
-            <a:schemeClr val="lt1"/>
-          </a:fontRef>
-        </p:style>
-        <p:txBody>
-          <a:bodyPr rtlCol="0" anchor="ctr"/>
-          <a:lstStyle/>
-          <a:p>
-            <a:pPr algn="ctr"/>
-          </a:p>
-        </p:txBody>
-      </p:sp>
-      <p:sp>
-        <p:nvSpPr>
-          <p:cNvPr id="11" name="Isosceles Triangle 10"/>
-          <p:cNvSpPr/>
-          <p:nvPr/>
-        </p:nvSpPr>
-        <p:spPr>
-          <a:xfrm rot="5400000">
-            <a:off x="8546896" y="1673352"/>
-            <a:ext cx="146304" cy="146304"/>
-          </a:xfrm>
-          <a:prstGeom prst="triangle">
-            <a:avLst/>
-          </a:prstGeom>
-          <a:solidFill>
-            <a:srgbClr val="0D9488"/>
-          </a:solidFill>
-          <a:ln>
-            <a:noFill/>
-          </a:ln>
-          <a:effectLst/>
-        </p:spPr>
-        <p:style>
-          <a:lnRef idx="1">
-            <a:schemeClr val="accent1"/>
-          </a:lnRef>
-          <a:fillRef idx="3">
-            <a:schemeClr val="accent1"/>
-          </a:fillRef>
-          <a:effectRef idx="2">
-            <a:schemeClr val="accent1"/>
-          </a:effectRef>
-          <a:fontRef idx="minor">
-            <a:schemeClr val="lt1"/>
-          </a:fontRef>
-        </p:style>
-        <p:txBody>
-          <a:bodyPr rtlCol="0" anchor="ctr"/>
-          <a:lstStyle/>
-          <a:p>
-            <a:pPr algn="ctr"/>
-          </a:p>
-        </p:txBody>
-      </p:sp>
-      <p:sp>
-        <p:nvSpPr>
-          <p:cNvPr id="12" name="Oval 11"/>
-          <p:cNvSpPr/>
-          <p:nvPr/>
-        </p:nvSpPr>
-        <p:spPr>
-          <a:xfrm>
-            <a:off x="2040940" y="1481328"/>
-            <a:ext cx="530352" cy="530352"/>
-          </a:xfrm>
-          <a:prstGeom prst="ellipse">
-            <a:avLst/>
-          </a:prstGeom>
-          <a:solidFill>
-            <a:srgbClr val="0D9488"/>
-          </a:solidFill>
-          <a:ln>
-            <a:noFill/>
-          </a:ln>
-          <a:effectLst/>
-        </p:spPr>
-        <p:style>
-          <a:lnRef idx="1">
-            <a:schemeClr val="accent1"/>
-          </a:lnRef>
-          <a:fillRef idx="3">
-            <a:schemeClr val="accent1"/>
-          </a:fillRef>
-          <a:effectRef idx="2">
-            <a:schemeClr val="accent1"/>
-          </a:effectRef>
-          <a:fontRef idx="minor">
-            <a:schemeClr val="lt1"/>
-          </a:fontRef>
-        </p:style>
-        <p:txBody>
-          <a:bodyPr rtlCol="0" anchor="ctr"/>
-          <a:lstStyle/>
-          <a:p>
-            <a:pPr algn="ctr"/>
-          </a:p>
-        </p:txBody>
-      </p:sp>
-      <p:sp>
-        <p:nvSpPr>
-          <p:cNvPr id="13" name="TextBox 12"/>
+          <p:cNvPr id="10" name="TextBox 9"/>
           <p:cNvSpPr txBox="1"/>
           <p:nvPr/>
         </p:nvSpPr>
@@ -8094,7 +8079,7 @@
       </p:sp>
       <p:sp>
         <p:nvSpPr>
-          <p:cNvPr id="14" name="Rounded Rectangle 13"/>
+          <p:cNvPr id="11" name="Rounded Rectangle 10"/>
           <p:cNvSpPr/>
           <p:nvPr/>
         </p:nvSpPr>
@@ -8142,7 +8127,7 @@
       </p:sp>
       <p:sp>
         <p:nvSpPr>
-          <p:cNvPr id="15" name="TextBox 14"/>
+          <p:cNvPr id="12" name="TextBox 11"/>
           <p:cNvSpPr txBox="1"/>
           <p:nvPr/>
         </p:nvSpPr>
@@ -8177,7 +8162,7 @@
       </p:sp>
       <p:sp>
         <p:nvSpPr>
-          <p:cNvPr id="16" name="TextBox 15"/>
+          <p:cNvPr id="13" name="TextBox 12"/>
           <p:cNvSpPr txBox="1"/>
           <p:nvPr/>
         </p:nvSpPr>
@@ -8216,7 +8201,7 @@
       </p:sp>
       <p:sp>
         <p:nvSpPr>
-          <p:cNvPr id="17" name="Oval 16"/>
+          <p:cNvPr id="14" name="Oval 13"/>
           <p:cNvSpPr/>
           <p:nvPr/>
         </p:nvSpPr>
@@ -8260,7 +8245,7 @@
       </p:sp>
       <p:sp>
         <p:nvSpPr>
-          <p:cNvPr id="18" name="TextBox 17"/>
+          <p:cNvPr id="15" name="TextBox 14"/>
           <p:cNvSpPr txBox="1"/>
           <p:nvPr/>
         </p:nvSpPr>
@@ -8295,7 +8280,7 @@
       </p:sp>
       <p:sp>
         <p:nvSpPr>
-          <p:cNvPr id="19" name="Rounded Rectangle 18"/>
+          <p:cNvPr id="16" name="Rounded Rectangle 15"/>
           <p:cNvSpPr/>
           <p:nvPr/>
         </p:nvSpPr>
@@ -8343,7 +8328,7 @@
       </p:sp>
       <p:sp>
         <p:nvSpPr>
-          <p:cNvPr id="20" name="TextBox 19"/>
+          <p:cNvPr id="17" name="TextBox 16"/>
           <p:cNvSpPr txBox="1"/>
           <p:nvPr/>
         </p:nvSpPr>
@@ -8378,7 +8363,7 @@
       </p:sp>
       <p:sp>
         <p:nvSpPr>
-          <p:cNvPr id="21" name="TextBox 20"/>
+          <p:cNvPr id="18" name="TextBox 17"/>
           <p:cNvSpPr txBox="1"/>
           <p:nvPr/>
         </p:nvSpPr>
@@ -8417,7 +8402,7 @@
       </p:sp>
       <p:sp>
         <p:nvSpPr>
-          <p:cNvPr id="22" name="Oval 21"/>
+          <p:cNvPr id="19" name="Oval 18"/>
           <p:cNvSpPr/>
           <p:nvPr/>
         </p:nvSpPr>
@@ -8461,7 +8446,7 @@
       </p:sp>
       <p:sp>
         <p:nvSpPr>
-          <p:cNvPr id="23" name="TextBox 22"/>
+          <p:cNvPr id="20" name="TextBox 19"/>
           <p:cNvSpPr txBox="1"/>
           <p:nvPr/>
         </p:nvSpPr>
@@ -8496,7 +8481,7 @@
       </p:sp>
       <p:sp>
         <p:nvSpPr>
-          <p:cNvPr id="24" name="Rounded Rectangle 23"/>
+          <p:cNvPr id="21" name="Rounded Rectangle 20"/>
           <p:cNvSpPr/>
           <p:nvPr/>
         </p:nvSpPr>
@@ -8544,7 +8529,7 @@
       </p:sp>
       <p:sp>
         <p:nvSpPr>
-          <p:cNvPr id="25" name="TextBox 24"/>
+          <p:cNvPr id="22" name="TextBox 21"/>
           <p:cNvSpPr txBox="1"/>
           <p:nvPr/>
         </p:nvSpPr>
@@ -8579,7 +8564,7 @@
       </p:sp>
       <p:sp>
         <p:nvSpPr>
-          <p:cNvPr id="26" name="TextBox 25"/>
+          <p:cNvPr id="23" name="TextBox 22"/>
           <p:cNvSpPr txBox="1"/>
           <p:nvPr/>
         </p:nvSpPr>
@@ -8618,7 +8603,7 @@
       </p:sp>
       <p:sp>
         <p:nvSpPr>
-          <p:cNvPr id="27" name="Oval 26"/>
+          <p:cNvPr id="24" name="Oval 23"/>
           <p:cNvSpPr/>
           <p:nvPr/>
         </p:nvSpPr>
@@ -8662,7 +8647,7 @@
       </p:sp>
       <p:sp>
         <p:nvSpPr>
-          <p:cNvPr id="28" name="TextBox 27"/>
+          <p:cNvPr id="25" name="TextBox 24"/>
           <p:cNvSpPr txBox="1"/>
           <p:nvPr/>
         </p:nvSpPr>
@@ -8697,7 +8682,7 @@
       </p:sp>
       <p:sp>
         <p:nvSpPr>
-          <p:cNvPr id="29" name="Rounded Rectangle 28"/>
+          <p:cNvPr id="26" name="Rounded Rectangle 25"/>
           <p:cNvSpPr/>
           <p:nvPr/>
         </p:nvSpPr>
@@ -8745,7 +8730,7 @@
       </p:sp>
       <p:sp>
         <p:nvSpPr>
-          <p:cNvPr id="30" name="TextBox 29"/>
+          <p:cNvPr id="27" name="TextBox 26"/>
           <p:cNvSpPr txBox="1"/>
           <p:nvPr/>
         </p:nvSpPr>
@@ -8780,7 +8765,7 @@
       </p:sp>
       <p:sp>
         <p:nvSpPr>
-          <p:cNvPr id="31" name="TextBox 30"/>
+          <p:cNvPr id="28" name="TextBox 27"/>
           <p:cNvSpPr txBox="1"/>
           <p:nvPr/>
         </p:nvSpPr>
@@ -8819,7 +8804,7 @@
       </p:sp>
       <p:sp>
         <p:nvSpPr>
-          <p:cNvPr id="32" name="TextBox 31"/>
+          <p:cNvPr id="29" name="TextBox 28"/>
           <p:cNvSpPr txBox="1"/>
           <p:nvPr/>
         </p:nvSpPr>
@@ -8854,7 +8839,7 @@
       </p:sp>
       <p:sp>
         <p:nvSpPr>
-          <p:cNvPr id="33" name="TextBox 32"/>
+          <p:cNvPr id="30" name="TextBox 29"/>
           <p:cNvSpPr txBox="1"/>
           <p:nvPr/>
         </p:nvSpPr>
@@ -8889,7 +8874,7 @@
       </p:sp>
       <p:sp>
         <p:nvSpPr>
-          <p:cNvPr id="34" name="Rectangle 33"/>
+          <p:cNvPr id="31" name="Rectangle 30"/>
           <p:cNvSpPr/>
           <p:nvPr/>
         </p:nvSpPr>
@@ -9413,7 +9398,7 @@
           <a:p>
             <a:pPr>
               <a:lnSpc>
-                <a:spcPct val="115000"/>
+                <a:spcPct val="149500"/>
               </a:lnSpc>
             </a:pPr>
             <a:r>
@@ -9432,13 +9417,22 @@
                 </a:solidFill>
                 <a:latin typeface="맑은 고딕"/>
               </a:rPr>
-              <a:t>서버를 직접 구매·설치·운영</a:t>
+              <a:t>서버를 </a:t>
+            </a:r>
+            <a:r>
+              <a:rPr sz="1700" b="1">
+                <a:solidFill>
+                  <a:srgbClr val="0D9488"/>
+                </a:solidFill>
+                <a:latin typeface="맑은 고딕"/>
+              </a:rPr>
+              <a:t>직접 구매·설치·운영</a:t>
             </a:r>
           </a:p>
           <a:p>
             <a:pPr>
               <a:lnSpc>
-                <a:spcPct val="115000"/>
+                <a:spcPct val="149500"/>
               </a:lnSpc>
             </a:pPr>
             <a:r>
@@ -9457,13 +9451,22 @@
                 </a:solidFill>
                 <a:latin typeface="맑은 고딕"/>
               </a:rPr>
-              <a:t>장애 발생 시 즉각 대응 어려움</a:t>
+              <a:t>장애 발생 시 </a:t>
+            </a:r>
+            <a:r>
+              <a:rPr sz="1700" b="1">
+                <a:solidFill>
+                  <a:srgbClr val="0D9488"/>
+                </a:solidFill>
+                <a:latin typeface="맑은 고딕"/>
+              </a:rPr>
+              <a:t>즉각 대응 어려움</a:t>
             </a:r>
           </a:p>
           <a:p>
             <a:pPr>
               <a:lnSpc>
-                <a:spcPct val="115000"/>
+                <a:spcPct val="149500"/>
               </a:lnSpc>
             </a:pPr>
             <a:r>
@@ -9482,13 +9485,22 @@
                 </a:solidFill>
                 <a:latin typeface="맑은 고딕"/>
               </a:rPr>
-              <a:t>트래픽 급증에 유연하게 대응 못함</a:t>
+              <a:t>트래픽 급증에 </a:t>
+            </a:r>
+            <a:r>
+              <a:rPr sz="1700" b="1">
+                <a:solidFill>
+                  <a:srgbClr val="0D9488"/>
+                </a:solidFill>
+                <a:latin typeface="맑은 고딕"/>
+              </a:rPr>
+              <a:t>유연하게 대응 못함</a:t>
             </a:r>
           </a:p>
           <a:p>
             <a:pPr>
               <a:lnSpc>
-                <a:spcPct val="115000"/>
+                <a:spcPct val="149500"/>
               </a:lnSpc>
             </a:pPr>
             <a:r>
@@ -9501,13 +9513,22 @@
               <a:t>●  </a:t>
             </a:r>
             <a:r>
+              <a:rPr sz="1700" b="1">
+                <a:solidFill>
+                  <a:srgbClr val="0D9488"/>
+                </a:solidFill>
+                <a:latin typeface="맑은 고딕"/>
+              </a:rPr>
+              <a:t>초기 투자 비용</a:t>
+            </a:r>
+            <a:r>
               <a:rPr sz="1700" b="0">
                 <a:solidFill>
                   <a:srgbClr val="222733"/>
                 </a:solidFill>
                 <a:latin typeface="맑은 고딕"/>
               </a:rPr>
-              <a:t>초기 투자 비용이 큼</a:t>
+              <a:t>이 큼</a:t>
             </a:r>
           </a:p>
         </p:txBody>
@@ -9879,7 +9900,7 @@
           <a:p>
             <a:pPr>
               <a:lnSpc>
-                <a:spcPct val="115000"/>
+                <a:spcPct val="149500"/>
               </a:lnSpc>
             </a:pPr>
             <a:r>
@@ -9898,13 +9919,22 @@
                 </a:solidFill>
                 <a:latin typeface="맑은 고딕"/>
               </a:rPr>
-              <a:t>정의: 인터넷으로 필요한 만큼 자원을 빌려쓰는 방식</a:t>
+              <a:t>정의: 인터넷으로 </a:t>
+            </a:r>
+            <a:r>
+              <a:rPr sz="1700" b="1">
+                <a:solidFill>
+                  <a:srgbClr val="0D9488"/>
+                </a:solidFill>
+                <a:latin typeface="맑은 고딕"/>
+              </a:rPr>
+              <a:t>필요한 만큼 자원을 빌려쓰는 방식</a:t>
             </a:r>
           </a:p>
           <a:p>
             <a:pPr>
               <a:lnSpc>
-                <a:spcPct val="115000"/>
+                <a:spcPct val="149500"/>
               </a:lnSpc>
             </a:pPr>
             <a:r>
@@ -9914,13 +9944,22 @@
                 </a:solidFill>
                 <a:latin typeface="맑은 고딕"/>
               </a:rPr>
-              <a:t>① 온디맨드 셀프서비스</a:t>
+              <a:t>① </a:t>
+            </a:r>
+            <a:r>
+              <a:rPr sz="1700" b="1">
+                <a:solidFill>
+                  <a:srgbClr val="0D9488"/>
+                </a:solidFill>
+                <a:latin typeface="맑은 고딕"/>
+              </a:rPr>
+              <a:t>온디맨드 셀프서비스</a:t>
             </a:r>
           </a:p>
           <a:p>
             <a:pPr>
               <a:lnSpc>
-                <a:spcPct val="115000"/>
+                <a:spcPct val="149500"/>
               </a:lnSpc>
             </a:pPr>
             <a:r>
@@ -9930,13 +9969,22 @@
                 </a:solidFill>
                 <a:latin typeface="맑은 고딕"/>
               </a:rPr>
-              <a:t>② 광범위한 네트워크 접근</a:t>
+              <a:t>② </a:t>
+            </a:r>
+            <a:r>
+              <a:rPr sz="1700" b="1">
+                <a:solidFill>
+                  <a:srgbClr val="0D9488"/>
+                </a:solidFill>
+                <a:latin typeface="맑은 고딕"/>
+              </a:rPr>
+              <a:t>광범위한 네트워크 접근</a:t>
             </a:r>
           </a:p>
           <a:p>
             <a:pPr>
               <a:lnSpc>
-                <a:spcPct val="115000"/>
+                <a:spcPct val="149500"/>
               </a:lnSpc>
             </a:pPr>
             <a:r>
@@ -9946,13 +9994,31 @@
                 </a:solidFill>
                 <a:latin typeface="맑은 고딕"/>
               </a:rPr>
-              <a:t>③ 자원 풀링(공유)</a:t>
+              <a:t>③ </a:t>
+            </a:r>
+            <a:r>
+              <a:rPr sz="1700" b="1">
+                <a:solidFill>
+                  <a:srgbClr val="0D9488"/>
+                </a:solidFill>
+                <a:latin typeface="맑은 고딕"/>
+              </a:rPr>
+              <a:t>자원 풀링</a:t>
+            </a:r>
+            <a:r>
+              <a:rPr sz="1700" b="0">
+                <a:solidFill>
+                  <a:srgbClr val="222733"/>
+                </a:solidFill>
+                <a:latin typeface="맑은 고딕"/>
+              </a:rPr>
+              <a:t>(공유)</a:t>
             </a:r>
           </a:p>
           <a:p>
             <a:pPr>
               <a:lnSpc>
-                <a:spcPct val="115000"/>
+                <a:spcPct val="149500"/>
               </a:lnSpc>
             </a:pPr>
             <a:r>
@@ -9962,13 +10028,22 @@
                 </a:solidFill>
                 <a:latin typeface="맑은 고딕"/>
               </a:rPr>
-              <a:t>④ 신속한 확장성</a:t>
+              <a:t>④ </a:t>
+            </a:r>
+            <a:r>
+              <a:rPr sz="1700" b="1">
+                <a:solidFill>
+                  <a:srgbClr val="0D9488"/>
+                </a:solidFill>
+                <a:latin typeface="맑은 고딕"/>
+              </a:rPr>
+              <a:t>신속한 확장성</a:t>
             </a:r>
           </a:p>
           <a:p>
             <a:pPr>
               <a:lnSpc>
-                <a:spcPct val="115000"/>
+                <a:spcPct val="149500"/>
               </a:lnSpc>
             </a:pPr>
             <a:r>
@@ -9978,7 +10053,25 @@
                 </a:solidFill>
                 <a:latin typeface="맑은 고딕"/>
               </a:rPr>
-              <a:t>⑤ 종량제 과금 (Pay-as-you-go)</a:t>
+              <a:t>⑤ </a:t>
+            </a:r>
+            <a:r>
+              <a:rPr sz="1700" b="1">
+                <a:solidFill>
+                  <a:srgbClr val="0D9488"/>
+                </a:solidFill>
+                <a:latin typeface="맑은 고딕"/>
+              </a:rPr>
+              <a:t>종량제 과금</a:t>
+            </a:r>
+            <a:r>
+              <a:rPr sz="1700" b="0">
+                <a:solidFill>
+                  <a:srgbClr val="222733"/>
+                </a:solidFill>
+                <a:latin typeface="맑은 고딕"/>
+              </a:rPr>
+              <a:t> (Pay-as-you-go)</a:t>
             </a:r>
           </a:p>
         </p:txBody>
@@ -12344,7 +12437,7 @@
           <a:p>
             <a:pPr>
               <a:lnSpc>
-                <a:spcPct val="115000"/>
+                <a:spcPct val="149500"/>
               </a:lnSpc>
             </a:pPr>
             <a:r>
@@ -12363,13 +12456,22 @@
                 </a:solidFill>
                 <a:latin typeface="맑은 고딕"/>
               </a:rPr>
-              <a:t>물리 서버 한 대를 여러 대처럼 쪼개 쓰는 기술</a:t>
+              <a:t>물리 서버 한 대를 </a:t>
+            </a:r>
+            <a:r>
+              <a:rPr sz="1700" b="1">
+                <a:solidFill>
+                  <a:srgbClr val="0D9488"/>
+                </a:solidFill>
+                <a:latin typeface="맑은 고딕"/>
+              </a:rPr>
+              <a:t>여러 대처럼 쪼개 쓰는 기술</a:t>
             </a:r>
           </a:p>
           <a:p>
             <a:pPr>
               <a:lnSpc>
-                <a:spcPct val="115000"/>
+                <a:spcPct val="149500"/>
               </a:lnSpc>
             </a:pPr>
             <a:r>
@@ -12388,13 +12490,22 @@
                 </a:solidFill>
                 <a:latin typeface="맑은 고딕"/>
               </a:rPr>
-              <a:t>Hypervisor가 하드웨어 자원을 나눠 각 VM에 배분</a:t>
+              <a:t>Hypervisor가 하드웨어 자원을 </a:t>
+            </a:r>
+            <a:r>
+              <a:rPr sz="1700" b="1">
+                <a:solidFill>
+                  <a:srgbClr val="0D9488"/>
+                </a:solidFill>
+                <a:latin typeface="맑은 고딕"/>
+              </a:rPr>
+              <a:t>나눠 각 VM에 배분</a:t>
             </a:r>
           </a:p>
           <a:p>
             <a:pPr>
               <a:lnSpc>
-                <a:spcPct val="115000"/>
+                <a:spcPct val="149500"/>
               </a:lnSpc>
             </a:pPr>
             <a:r>
@@ -12413,7 +12524,16 @@
                 </a:solidFill>
                 <a:latin typeface="맑은 고딕"/>
               </a:rPr>
-              <a:t>VM마다 자체 OS(Guest OS)를 통째로 가짐</a:t>
+              <a:t>VM마다 </a:t>
+            </a:r>
+            <a:r>
+              <a:rPr sz="1700" b="1">
+                <a:solidFill>
+                  <a:srgbClr val="0D9488"/>
+                </a:solidFill>
+                <a:latin typeface="맑은 고딕"/>
+              </a:rPr>
+              <a:t>자체 OS(Guest OS)를 통째로 가짐</a:t>
             </a:r>
           </a:p>
         </p:txBody>

--- a/class/cloud_infra_mgmt/01주차_클라우드개념_Docker입문/01_강의자료/1차시_클라우드패러다임과가상화이론.pptx
+++ b/class/cloud_infra_mgmt/01주차_클라우드개념_Docker입문/01_강의자료/1차시_클라우드패러다임과가상화이론.pptx
@@ -5078,6 +5078,8 @@
                   <a:srgbClr val="14B8A6"/>
                 </a:solidFill>
                 <a:latin typeface="맑은 고딕"/>
+                <a:ea typeface="맑은 고딕"/>
+                <a:cs typeface="맑은 고딕"/>
               </a:rPr>
               <a:t>클라우드인프라관리  ·  1주차 1차시</a:t>
             </a:r>
@@ -5113,6 +5115,8 @@
                   <a:srgbClr val="FFFFFF"/>
                 </a:solidFill>
                 <a:latin typeface="맑은 고딕"/>
+                <a:ea typeface="맑은 고딕"/>
+                <a:cs typeface="맑은 고딕"/>
               </a:rPr>
               <a:t>클라우드 컴퓨팅 패러다임과</a:t>
             </a:r>
@@ -5125,6 +5129,8 @@
                   <a:srgbClr val="FFFFFF"/>
                 </a:solidFill>
                 <a:latin typeface="맑은 고딕"/>
+                <a:ea typeface="맑은 고딕"/>
+                <a:cs typeface="맑은 고딕"/>
               </a:rPr>
               <a:t>가상화 기술의 이해</a:t>
             </a:r>
@@ -5160,6 +5166,8 @@
                   <a:srgbClr val="C9D3E6"/>
                 </a:solidFill>
                 <a:latin typeface="맑은 고딕"/>
+                <a:ea typeface="맑은 고딕"/>
+                <a:cs typeface="맑은 고딕"/>
               </a:rPr>
               <a:t>On-Premise vs Cloud · Hypervisor 기반 가상화</a:t>
             </a:r>
@@ -5195,6 +5203,8 @@
                   <a:srgbClr val="FFFFFF"/>
                 </a:solidFill>
                 <a:latin typeface="맑은 고딕"/>
+                <a:ea typeface="맑은 고딕"/>
+                <a:cs typeface="맑은 고딕"/>
               </a:rPr>
               <a:t>영남이공대학교 김지윤교수</a:t>
             </a:r>
@@ -5354,6 +5364,8 @@
                   <a:srgbClr val="14213D"/>
                 </a:solidFill>
                 <a:latin typeface="맑은 고딕"/>
+                <a:ea typeface="맑은 고딕"/>
+                <a:cs typeface="맑은 고딕"/>
               </a:rPr>
               <a:t>02</a:t>
             </a:r>
@@ -5389,6 +5401,8 @@
                   <a:srgbClr val="14B8A6"/>
                 </a:solidFill>
                 <a:latin typeface="맑은 고딕"/>
+                <a:ea typeface="맑은 고딕"/>
+                <a:cs typeface="맑은 고딕"/>
               </a:rPr>
               <a:t>PART 2 · 가상화 기술</a:t>
             </a:r>
@@ -5424,6 +5438,8 @@
                   <a:srgbClr val="FFFFFF"/>
                 </a:solidFill>
                 <a:latin typeface="맑은 고딕"/>
+                <a:ea typeface="맑은 고딕"/>
+                <a:cs typeface="맑은 고딕"/>
               </a:rPr>
               <a:t>VM 방식의 한계</a:t>
             </a:r>
@@ -5463,6 +5479,8 @@
                   <a:srgbClr val="0D9488"/>
                 </a:solidFill>
                 <a:latin typeface="맑은 고딕"/>
+                <a:ea typeface="맑은 고딕"/>
+                <a:cs typeface="맑은 고딕"/>
               </a:rPr>
               <a:t>●  </a:t>
             </a:r>
@@ -5472,6 +5490,8 @@
                   <a:srgbClr val="0D9488"/>
                 </a:solidFill>
                 <a:latin typeface="맑은 고딕"/>
+                <a:ea typeface="맑은 고딕"/>
+                <a:cs typeface="맑은 고딕"/>
               </a:rPr>
               <a:t>무겁다</a:t>
             </a:r>
@@ -5481,6 +5501,8 @@
                   <a:srgbClr val="222733"/>
                 </a:solidFill>
                 <a:latin typeface="맑은 고딕"/>
+                <a:ea typeface="맑은 고딕"/>
+                <a:cs typeface="맑은 고딕"/>
               </a:rPr>
               <a:t> – VM마다 완전한 OS 포함 → 용량 수 GB~수십 GB</a:t>
             </a:r>
@@ -5497,6 +5519,8 @@
                   <a:srgbClr val="0D9488"/>
                 </a:solidFill>
                 <a:latin typeface="맑은 고딕"/>
+                <a:ea typeface="맑은 고딕"/>
+                <a:cs typeface="맑은 고딕"/>
               </a:rPr>
               <a:t>●  </a:t>
             </a:r>
@@ -5506,6 +5530,8 @@
                   <a:srgbClr val="0D9488"/>
                 </a:solidFill>
                 <a:latin typeface="맑은 고딕"/>
+                <a:ea typeface="맑은 고딕"/>
+                <a:cs typeface="맑은 고딕"/>
               </a:rPr>
               <a:t>느리다</a:t>
             </a:r>
@@ -5515,6 +5541,8 @@
                   <a:srgbClr val="222733"/>
                 </a:solidFill>
                 <a:latin typeface="맑은 고딕"/>
+                <a:ea typeface="맑은 고딕"/>
+                <a:cs typeface="맑은 고딕"/>
               </a:rPr>
               <a:t> – OS 부팅 필요 → 수십 초~수 분 소요</a:t>
             </a:r>
@@ -5531,6 +5559,8 @@
                   <a:srgbClr val="0D9488"/>
                 </a:solidFill>
                 <a:latin typeface="맑은 고딕"/>
+                <a:ea typeface="맑은 고딕"/>
+                <a:cs typeface="맑은 고딕"/>
               </a:rPr>
               <a:t>●  </a:t>
             </a:r>
@@ -5540,6 +5570,8 @@
                   <a:srgbClr val="0D9488"/>
                 </a:solidFill>
                 <a:latin typeface="맑은 고딕"/>
+                <a:ea typeface="맑은 고딕"/>
+                <a:cs typeface="맑은 고딕"/>
               </a:rPr>
               <a:t>낭비된다</a:t>
             </a:r>
@@ -5549,6 +5581,8 @@
                   <a:srgbClr val="222733"/>
                 </a:solidFill>
                 <a:latin typeface="맑은 고딕"/>
+                <a:ea typeface="맑은 고딕"/>
+                <a:cs typeface="맑은 고딕"/>
               </a:rPr>
               <a:t> – 여러 VM 동시 실행 시 CPU/메모리 중복 소모</a:t>
             </a:r>
@@ -5628,6 +5662,8 @@
                   <a:srgbClr val="FFFFFF"/>
                 </a:solidFill>
                 <a:latin typeface="맑은 고딕"/>
+                <a:ea typeface="맑은 고딕"/>
+                <a:cs typeface="맑은 고딕"/>
               </a:rPr>
               <a:t>💬  다음 시간 예고</a:t>
             </a:r>
@@ -5663,6 +5699,8 @@
                   <a:srgbClr val="FFFFFF"/>
                 </a:solidFill>
                 <a:latin typeface="맑은 고딕"/>
+                <a:ea typeface="맑은 고딕"/>
+                <a:cs typeface="맑은 고딕"/>
               </a:rPr>
               <a:t>"앱 하나 실행하려고 OS를 통째로 복제해야 할까?"</a:t>
             </a:r>
@@ -5675,6 +5713,8 @@
                   <a:srgbClr val="FFFFFF"/>
                 </a:solidFill>
                 <a:latin typeface="맑은 고딕"/>
+                <a:ea typeface="맑은 고딕"/>
+                <a:cs typeface="맑은 고딕"/>
               </a:rPr>
               <a:t>→ 이 질문의 답은 2차시 '컨테이너'에서 확인합니다.</a:t>
             </a:r>
@@ -5710,6 +5750,8 @@
                   <a:srgbClr val="5B6373"/>
                 </a:solidFill>
                 <a:latin typeface="맑은 고딕"/>
+                <a:ea typeface="맑은 고딕"/>
+                <a:cs typeface="맑은 고딕"/>
               </a:rPr>
               <a:t>클라우드인프라관리  ·  1주차 1차시</a:t>
             </a:r>
@@ -5745,6 +5787,8 @@
                   <a:srgbClr val="5B6373"/>
                 </a:solidFill>
                 <a:latin typeface="맑은 고딕"/>
+                <a:ea typeface="맑은 고딕"/>
+                <a:cs typeface="맑은 고딕"/>
               </a:rPr>
               <a:t>10 / 14</a:t>
             </a:r>
@@ -5948,6 +5992,8 @@
                   <a:srgbClr val="14213D"/>
                 </a:solidFill>
                 <a:latin typeface="맑은 고딕"/>
+                <a:ea typeface="맑은 고딕"/>
+                <a:cs typeface="맑은 고딕"/>
               </a:rPr>
               <a:t>03</a:t>
             </a:r>
@@ -5983,6 +6029,8 @@
                   <a:srgbClr val="14B8A6"/>
                 </a:solidFill>
                 <a:latin typeface="맑은 고딕"/>
+                <a:ea typeface="맑은 고딕"/>
+                <a:cs typeface="맑은 고딕"/>
               </a:rPr>
               <a:t>실습 안내</a:t>
             </a:r>
@@ -6018,6 +6066,8 @@
                   <a:srgbClr val="FFFFFF"/>
                 </a:solidFill>
                 <a:latin typeface="맑은 고딕"/>
+                <a:ea typeface="맑은 고딕"/>
+                <a:cs typeface="맑은 고딕"/>
               </a:rPr>
               <a:t>오늘의 실습 — Killercoda 터미널 익히기</a:t>
             </a:r>
@@ -6057,6 +6107,8 @@
                   <a:srgbClr val="0D9488"/>
                 </a:solidFill>
                 <a:latin typeface="맑은 고딕"/>
+                <a:ea typeface="맑은 고딕"/>
+                <a:cs typeface="맑은 고딕"/>
               </a:rPr>
               <a:t>●  </a:t>
             </a:r>
@@ -6066,6 +6118,8 @@
                   <a:srgbClr val="222733"/>
                 </a:solidFill>
                 <a:latin typeface="맑은 고딕"/>
+                <a:ea typeface="맑은 고딕"/>
+                <a:cs typeface="맑은 고딕"/>
               </a:rPr>
               <a:t>브라우저에서 바로 실습, </a:t>
             </a:r>
@@ -6075,6 +6129,8 @@
                   <a:srgbClr val="0D9488"/>
                 </a:solidFill>
                 <a:latin typeface="맑은 고딕"/>
+                <a:ea typeface="맑은 고딕"/>
+                <a:cs typeface="맑은 고딕"/>
               </a:rPr>
               <a:t>설치 불필요</a:t>
             </a:r>
@@ -6091,6 +6147,8 @@
                   <a:srgbClr val="DC2626"/>
                 </a:solidFill>
                 <a:latin typeface="맑은 고딕"/>
+                <a:ea typeface="맑은 고딕"/>
+                <a:cs typeface="맑은 고딕"/>
               </a:rPr>
               <a:t>●  </a:t>
             </a:r>
@@ -6100,6 +6158,8 @@
                   <a:srgbClr val="DC2626"/>
                 </a:solidFill>
                 <a:latin typeface="맑은 고딕"/>
+                <a:ea typeface="맑은 고딕"/>
+                <a:cs typeface="맑은 고딕"/>
               </a:rPr>
               <a:t>60분 시간 제한</a:t>
             </a:r>
@@ -6109,6 +6169,8 @@
                   <a:srgbClr val="222733"/>
                 </a:solidFill>
                 <a:latin typeface="맑은 고딕"/>
+                <a:ea typeface="맑은 고딕"/>
+                <a:cs typeface="맑은 고딕"/>
               </a:rPr>
               <a:t>이 있음 (초기화돼도 로컬 VM에서 이어가면 OK)</a:t>
             </a:r>
@@ -6125,6 +6187,8 @@
                   <a:srgbClr val="0D9488"/>
                 </a:solidFill>
                 <a:latin typeface="맑은 고딕"/>
+                <a:ea typeface="맑은 고딕"/>
+                <a:cs typeface="맑은 고딕"/>
               </a:rPr>
               <a:t>●  </a:t>
             </a:r>
@@ -6134,6 +6198,8 @@
                   <a:srgbClr val="222733"/>
                 </a:solidFill>
                 <a:latin typeface="맑은 고딕"/>
+                <a:ea typeface="맑은 고딕"/>
+                <a:cs typeface="맑은 고딕"/>
               </a:rPr>
               <a:t>whoami / uname -a / nproc / free -h 로 지금 접속한 가상 환경 살펴보기</a:t>
             </a:r>
@@ -6150,6 +6216,8 @@
                   <a:srgbClr val="0D9488"/>
                 </a:solidFill>
                 <a:latin typeface="맑은 고딕"/>
+                <a:ea typeface="맑은 고딕"/>
+                <a:cs typeface="맑은 고딕"/>
               </a:rPr>
               <a:t>●  </a:t>
             </a:r>
@@ -6159,6 +6227,8 @@
                   <a:srgbClr val="222733"/>
                 </a:solidFill>
                 <a:latin typeface="맑은 고딕"/>
+                <a:ea typeface="맑은 고딕"/>
+                <a:cs typeface="맑은 고딕"/>
               </a:rPr>
               <a:t>→ 이 터미널도, 여러분의 로컬 VM도 모두 오늘 배운 </a:t>
             </a:r>
@@ -6168,6 +6238,8 @@
                   <a:srgbClr val="0D9488"/>
                 </a:solidFill>
                 <a:latin typeface="맑은 고딕"/>
+                <a:ea typeface="맑은 고딕"/>
+                <a:cs typeface="맑은 고딕"/>
               </a:rPr>
               <a:t>가상화 기술의 결과물</a:t>
             </a:r>
@@ -6177,6 +6249,8 @@
                   <a:srgbClr val="222733"/>
                 </a:solidFill>
                 <a:latin typeface="맑은 고딕"/>
+                <a:ea typeface="맑은 고딕"/>
+                <a:cs typeface="맑은 고딕"/>
               </a:rPr>
               <a:t>입니다</a:t>
             </a:r>
@@ -6212,6 +6286,8 @@
                   <a:srgbClr val="5B6373"/>
                 </a:solidFill>
                 <a:latin typeface="맑은 고딕"/>
+                <a:ea typeface="맑은 고딕"/>
+                <a:cs typeface="맑은 고딕"/>
               </a:rPr>
               <a:t>클라우드인프라관리  ·  1주차 1차시</a:t>
             </a:r>
@@ -6247,6 +6323,8 @@
                   <a:srgbClr val="5B6373"/>
                 </a:solidFill>
                 <a:latin typeface="맑은 고딕"/>
+                <a:ea typeface="맑은 고딕"/>
+                <a:cs typeface="맑은 고딕"/>
               </a:rPr>
               <a:t>11 / 14</a:t>
             </a:r>
@@ -6450,6 +6528,8 @@
                   <a:srgbClr val="14213D"/>
                 </a:solidFill>
                 <a:latin typeface="맑은 고딕"/>
+                <a:ea typeface="맑은 고딕"/>
+                <a:cs typeface="맑은 고딕"/>
               </a:rPr>
               <a:t>03</a:t>
             </a:r>
@@ -6485,6 +6565,8 @@
                   <a:srgbClr val="14B8A6"/>
                 </a:solidFill>
                 <a:latin typeface="맑은 고딕"/>
+                <a:ea typeface="맑은 고딕"/>
+                <a:cs typeface="맑은 고딕"/>
               </a:rPr>
               <a:t>실습 안내</a:t>
             </a:r>
@@ -6520,6 +6602,8 @@
                   <a:srgbClr val="FFFFFF"/>
                 </a:solidFill>
                 <a:latin typeface="맑은 고딕"/>
+                <a:ea typeface="맑은 고딕"/>
+                <a:cs typeface="맑은 고딕"/>
               </a:rPr>
               <a:t>로컬 VM 환경 최종 점검 (0주차 확인)</a:t>
             </a:r>
@@ -6559,6 +6643,8 @@
                   <a:srgbClr val="0D9488"/>
                 </a:solidFill>
                 <a:latin typeface="맑은 고딕"/>
+                <a:ea typeface="맑은 고딕"/>
+                <a:cs typeface="맑은 고딕"/>
               </a:rPr>
               <a:t>●  </a:t>
             </a:r>
@@ -6568,6 +6654,8 @@
                   <a:srgbClr val="222733"/>
                 </a:solidFill>
                 <a:latin typeface="맑은 고딕"/>
+                <a:ea typeface="맑은 고딕"/>
+                <a:cs typeface="맑은 고딕"/>
               </a:rPr>
               <a:t>0주차에 배포받은 개인 VM(cloud-lab) </a:t>
             </a:r>
@@ -6577,6 +6665,8 @@
                   <a:srgbClr val="0D9488"/>
                 </a:solidFill>
                 <a:latin typeface="맑은 고딕"/>
+                <a:ea typeface="맑은 고딕"/>
+                <a:cs typeface="맑은 고딕"/>
               </a:rPr>
               <a:t>로그인 상태 확인</a:t>
             </a:r>
@@ -6593,6 +6683,8 @@
                   <a:srgbClr val="0D9488"/>
                 </a:solidFill>
                 <a:latin typeface="맑은 고딕"/>
+                <a:ea typeface="맑은 고딕"/>
+                <a:cs typeface="맑은 고딕"/>
               </a:rPr>
               <a:t>●  </a:t>
             </a:r>
@@ -6602,6 +6694,8 @@
                   <a:srgbClr val="222733"/>
                 </a:solidFill>
                 <a:latin typeface="맑은 고딕"/>
+                <a:ea typeface="맑은 고딕"/>
+                <a:cs typeface="맑은 고딕"/>
               </a:rPr>
               <a:t>docker --version 정상 출력 확인</a:t>
             </a:r>
@@ -6618,6 +6712,8 @@
                   <a:srgbClr val="0D9488"/>
                 </a:solidFill>
                 <a:latin typeface="맑은 고딕"/>
+                <a:ea typeface="맑은 고딕"/>
+                <a:cs typeface="맑은 고딕"/>
               </a:rPr>
               <a:t>●  </a:t>
             </a:r>
@@ -6627,6 +6723,8 @@
                   <a:srgbClr val="222733"/>
                 </a:solidFill>
                 <a:latin typeface="맑은 고딕"/>
+                <a:ea typeface="맑은 고딕"/>
+                <a:cs typeface="맑은 고딕"/>
               </a:rPr>
               <a:t>git --version 정상 출력 확인</a:t>
             </a:r>
@@ -6643,6 +6741,8 @@
                   <a:srgbClr val="0D9488"/>
                 </a:solidFill>
                 <a:latin typeface="맑은 고딕"/>
+                <a:ea typeface="맑은 고딕"/>
+                <a:cs typeface="맑은 고딕"/>
               </a:rPr>
               <a:t>●  </a:t>
             </a:r>
@@ -6652,6 +6752,8 @@
                   <a:srgbClr val="0D9488"/>
                 </a:solidFill>
                 <a:latin typeface="맑은 고딕"/>
+                <a:ea typeface="맑은 고딕"/>
+                <a:cs typeface="맑은 고딕"/>
               </a:rPr>
               <a:t>문제 발생 시</a:t>
             </a:r>
@@ -6661,6 +6763,8 @@
                   <a:srgbClr val="222733"/>
                 </a:solidFill>
                 <a:latin typeface="맑은 고딕"/>
+                <a:ea typeface="맑은 고딕"/>
+                <a:cs typeface="맑은 고딕"/>
               </a:rPr>
               <a:t> → 06_로컬VM_과제복습 / 07_오류FAQ 참고</a:t>
             </a:r>
@@ -6696,6 +6800,8 @@
                   <a:srgbClr val="5B6373"/>
                 </a:solidFill>
                 <a:latin typeface="맑은 고딕"/>
+                <a:ea typeface="맑은 고딕"/>
+                <a:cs typeface="맑은 고딕"/>
               </a:rPr>
               <a:t>클라우드인프라관리  ·  1주차 1차시</a:t>
             </a:r>
@@ -6731,6 +6837,8 @@
                   <a:srgbClr val="5B6373"/>
                 </a:solidFill>
                 <a:latin typeface="맑은 고딕"/>
+                <a:ea typeface="맑은 고딕"/>
+                <a:cs typeface="맑은 고딕"/>
               </a:rPr>
               <a:t>12 / 14</a:t>
             </a:r>
@@ -6916,6 +7024,8 @@
                   <a:srgbClr val="FFFFFF"/>
                 </a:solidFill>
                 <a:latin typeface="맑은 고딕"/>
+                <a:ea typeface="맑은 고딕"/>
+                <a:cs typeface="맑은 고딕"/>
               </a:rPr>
               <a:t>오늘의 정리</a:t>
             </a:r>
@@ -6969,6 +7079,8 @@
                   <a:srgbClr val="14213D"/>
                 </a:solidFill>
                 <a:latin typeface="맑은 고딕"/>
+                <a:ea typeface="맑은 고딕"/>
+                <a:cs typeface="맑은 고딕"/>
               </a:rPr>
               <a:t>1</a:t>
             </a:r>
@@ -7004,6 +7116,8 @@
                   <a:srgbClr val="FFFFFF"/>
                 </a:solidFill>
                 <a:latin typeface="맑은 고딕"/>
+                <a:ea typeface="맑은 고딕"/>
+                <a:cs typeface="맑은 고딕"/>
               </a:rPr>
               <a:t>클라우드 = 필요한 만큼 빌려쓰는 컴퓨팅 자원</a:t>
             </a:r>
@@ -7057,6 +7171,8 @@
                   <a:srgbClr val="14213D"/>
                 </a:solidFill>
                 <a:latin typeface="맑은 고딕"/>
+                <a:ea typeface="맑은 고딕"/>
+                <a:cs typeface="맑은 고딕"/>
               </a:rPr>
               <a:t>2</a:t>
             </a:r>
@@ -7092,6 +7208,8 @@
                   <a:srgbClr val="FFFFFF"/>
                 </a:solidFill>
                 <a:latin typeface="맑은 고딕"/>
+                <a:ea typeface="맑은 고딕"/>
+                <a:cs typeface="맑은 고딕"/>
               </a:rPr>
               <a:t>가상화(VM) = 물리 서버를 여러 대처럼 쪼개 쓰지만, 무겁고 느리다</a:t>
             </a:r>
@@ -7233,6 +7351,8 @@
                   <a:srgbClr val="FFFFFF"/>
                 </a:solidFill>
                 <a:latin typeface="맑은 고딕"/>
+                <a:ea typeface="맑은 고딕"/>
+                <a:cs typeface="맑은 고딕"/>
               </a:rPr>
               <a:t>다음 차시 예고</a:t>
             </a:r>
@@ -7268,6 +7388,8 @@
                   <a:srgbClr val="14B8A6"/>
                 </a:solidFill>
                 <a:latin typeface="맑은 고딕"/>
+                <a:ea typeface="맑은 고딕"/>
+                <a:cs typeface="맑은 고딕"/>
               </a:rPr>
               <a:t>다음 차시 예고 — 1주차 2차시</a:t>
             </a:r>
@@ -7303,6 +7425,8 @@
                   <a:srgbClr val="FFFFFF"/>
                 </a:solidFill>
                 <a:latin typeface="맑은 고딕"/>
+                <a:ea typeface="맑은 고딕"/>
+                <a:cs typeface="맑은 고딕"/>
               </a:rPr>
               <a:t>"앱 하나 실행하려고 OS를 통째로 복제해야 할까?"에 대한 답 — 컨테이너와 Docker를 처음 다룹니다. 오늘부터는 직접 docker run 명령어를 실행해봅니다.</a:t>
             </a:r>
@@ -7444,6 +7568,8 @@
                   <a:srgbClr val="14B8A6"/>
                 </a:solidFill>
                 <a:latin typeface="맑은 고딕"/>
+                <a:ea typeface="맑은 고딕"/>
+                <a:cs typeface="맑은 고딕"/>
               </a:rPr>
               <a:t>SESSION OVERVIEW</a:t>
             </a:r>
@@ -7479,6 +7605,8 @@
                   <a:srgbClr val="FFFFFF"/>
                 </a:solidFill>
                 <a:latin typeface="맑은 고딕"/>
+                <a:ea typeface="맑은 고딕"/>
+                <a:cs typeface="맑은 고딕"/>
               </a:rPr>
               <a:t>오늘의 학습 목표</a:t>
             </a:r>
@@ -7518,6 +7646,8 @@
                   <a:srgbClr val="222733"/>
                 </a:solidFill>
                 <a:latin typeface="맑은 고딕"/>
+                <a:ea typeface="맑은 고딕"/>
+                <a:cs typeface="맑은 고딕"/>
               </a:rPr>
               <a:t>1.  </a:t>
             </a:r>
@@ -7527,6 +7657,8 @@
                   <a:srgbClr val="0D9488"/>
                 </a:solidFill>
                 <a:latin typeface="맑은 고딕"/>
+                <a:ea typeface="맑은 고딕"/>
+                <a:cs typeface="맑은 고딕"/>
               </a:rPr>
               <a:t>클라우드 vs 온프레미스</a:t>
             </a:r>
@@ -7536,6 +7668,8 @@
                   <a:srgbClr val="222733"/>
                 </a:solidFill>
                 <a:latin typeface="맑은 고딕"/>
+                <a:ea typeface="맑은 고딕"/>
+                <a:cs typeface="맑은 고딕"/>
               </a:rPr>
               <a:t>, 무엇이 다른가</a:t>
             </a:r>
@@ -7552,6 +7686,8 @@
                   <a:srgbClr val="222733"/>
                 </a:solidFill>
                 <a:latin typeface="맑은 고딕"/>
+                <a:ea typeface="맑은 고딕"/>
+                <a:cs typeface="맑은 고딕"/>
               </a:rPr>
               <a:t>2.  </a:t>
             </a:r>
@@ -7561,6 +7697,8 @@
                   <a:srgbClr val="0D9488"/>
                 </a:solidFill>
                 <a:latin typeface="맑은 고딕"/>
+                <a:ea typeface="맑은 고딕"/>
+                <a:cs typeface="맑은 고딕"/>
               </a:rPr>
               <a:t>가상화(Virtualization)</a:t>
             </a:r>
@@ -7570,6 +7708,8 @@
                   <a:srgbClr val="222733"/>
                 </a:solidFill>
                 <a:latin typeface="맑은 고딕"/>
+                <a:ea typeface="맑은 고딕"/>
+                <a:cs typeface="맑은 고딕"/>
               </a:rPr>
               <a:t>가 왜 필요했고, 어떤 한계가 있는가</a:t>
             </a:r>
@@ -7605,6 +7745,8 @@
                   <a:srgbClr val="5B6373"/>
                 </a:solidFill>
                 <a:latin typeface="맑은 고딕"/>
+                <a:ea typeface="맑은 고딕"/>
+                <a:cs typeface="맑은 고딕"/>
               </a:rPr>
               <a:t>클라우드인프라관리  ·  1주차 1차시</a:t>
             </a:r>
@@ -7640,6 +7782,8 @@
                   <a:srgbClr val="5B6373"/>
                 </a:solidFill>
                 <a:latin typeface="맑은 고딕"/>
+                <a:ea typeface="맑은 고딕"/>
+                <a:cs typeface="맑은 고딕"/>
               </a:rPr>
               <a:t>02 / 14</a:t>
             </a:r>
@@ -7825,6 +7969,8 @@
                   <a:srgbClr val="14B8A6"/>
                 </a:solidFill>
                 <a:latin typeface="맑은 고딕"/>
+                <a:ea typeface="맑은 고딕"/>
+                <a:cs typeface="맑은 고딕"/>
               </a:rPr>
               <a:t>SESSION OVERVIEW</a:t>
             </a:r>
@@ -7860,6 +8006,8 @@
                   <a:srgbClr val="FFFFFF"/>
                 </a:solidFill>
                 <a:latin typeface="맑은 고딕"/>
+                <a:ea typeface="맑은 고딕"/>
+                <a:cs typeface="맑은 고딕"/>
               </a:rPr>
               <a:t>오늘의 진행 순서</a:t>
             </a:r>
@@ -8071,6 +8219,8 @@
                   <a:srgbClr val="FFFFFF"/>
                 </a:solidFill>
                 <a:latin typeface="맑은 고딕"/>
+                <a:ea typeface="맑은 고딕"/>
+                <a:cs typeface="맑은 고딕"/>
               </a:rPr>
               <a:t>1</a:t>
             </a:r>
@@ -8154,6 +8304,8 @@
                   <a:srgbClr val="14213D"/>
                 </a:solidFill>
                 <a:latin typeface="맑은 고딕"/>
+                <a:ea typeface="맑은 고딕"/>
+                <a:cs typeface="맑은 고딕"/>
               </a:rPr>
               <a:t>개념 설명</a:t>
             </a:r>
@@ -8193,6 +8345,8 @@
                   <a:srgbClr val="222733"/>
                 </a:solidFill>
                 <a:latin typeface="맑은 고딕"/>
+                <a:ea typeface="맑은 고딕"/>
+                <a:cs typeface="맑은 고딕"/>
               </a:rPr>
               <a:t>강의자료 기반 직접 강의</a:t>
             </a:r>
@@ -8272,6 +8426,8 @@
                   <a:srgbClr val="FFFFFF"/>
                 </a:solidFill>
                 <a:latin typeface="맑은 고딕"/>
+                <a:ea typeface="맑은 고딕"/>
+                <a:cs typeface="맑은 고딕"/>
               </a:rPr>
               <a:t>2</a:t>
             </a:r>
@@ -8355,6 +8511,8 @@
                   <a:srgbClr val="14213D"/>
                 </a:solidFill>
                 <a:latin typeface="맑은 고딕"/>
+                <a:ea typeface="맑은 고딕"/>
+                <a:cs typeface="맑은 고딕"/>
               </a:rPr>
               <a:t>Killercoda</a:t>
             </a:r>
@@ -8394,6 +8552,8 @@
                   <a:srgbClr val="222733"/>
                 </a:solidFill>
                 <a:latin typeface="맑은 고딕"/>
+                <a:ea typeface="맑은 고딕"/>
+                <a:cs typeface="맑은 고딕"/>
               </a:rPr>
               <a:t>터미널 기본 명령어 실습</a:t>
             </a:r>
@@ -8473,6 +8633,8 @@
                   <a:srgbClr val="FFFFFF"/>
                 </a:solidFill>
                 <a:latin typeface="맑은 고딕"/>
+                <a:ea typeface="맑은 고딕"/>
+                <a:cs typeface="맑은 고딕"/>
               </a:rPr>
               <a:t>3</a:t>
             </a:r>
@@ -8556,6 +8718,8 @@
                   <a:srgbClr val="14213D"/>
                 </a:solidFill>
                 <a:latin typeface="맑은 고딕"/>
+                <a:ea typeface="맑은 고딕"/>
+                <a:cs typeface="맑은 고딕"/>
               </a:rPr>
               <a:t>VM 안내</a:t>
             </a:r>
@@ -8595,6 +8759,8 @@
                   <a:srgbClr val="222733"/>
                 </a:solidFill>
                 <a:latin typeface="맑은 고딕"/>
+                <a:ea typeface="맑은 고딕"/>
+                <a:cs typeface="맑은 고딕"/>
               </a:rPr>
               <a:t>0주차 VM 점검</a:t>
             </a:r>
@@ -8674,6 +8840,8 @@
                   <a:srgbClr val="FFFFFF"/>
                 </a:solidFill>
                 <a:latin typeface="맑은 고딕"/>
+                <a:ea typeface="맑은 고딕"/>
+                <a:cs typeface="맑은 고딕"/>
               </a:rPr>
               <a:t>4</a:t>
             </a:r>
@@ -8757,6 +8925,8 @@
                   <a:srgbClr val="14213D"/>
                 </a:solidFill>
                 <a:latin typeface="맑은 고딕"/>
+                <a:ea typeface="맑은 고딕"/>
+                <a:cs typeface="맑은 고딕"/>
               </a:rPr>
               <a:t>결과 제출</a:t>
             </a:r>
@@ -8796,6 +8966,8 @@
                   <a:srgbClr val="222733"/>
                 </a:solidFill>
                 <a:latin typeface="맑은 고딕"/>
+                <a:ea typeface="맑은 고딕"/>
+                <a:cs typeface="맑은 고딕"/>
               </a:rPr>
               <a:t>체크리스트 제출</a:t>
             </a:r>
@@ -8831,6 +9003,8 @@
                   <a:srgbClr val="5B6373"/>
                 </a:solidFill>
                 <a:latin typeface="맑은 고딕"/>
+                <a:ea typeface="맑은 고딕"/>
+                <a:cs typeface="맑은 고딕"/>
               </a:rPr>
               <a:t>클라우드인프라관리  ·  1주차 1차시</a:t>
             </a:r>
@@ -8866,6 +9040,8 @@
                   <a:srgbClr val="5B6373"/>
                 </a:solidFill>
                 <a:latin typeface="맑은 고딕"/>
+                <a:ea typeface="맑은 고딕"/>
+                <a:cs typeface="맑은 고딕"/>
               </a:rPr>
               <a:t>03 / 14</a:t>
             </a:r>
@@ -9069,6 +9245,8 @@
                   <a:srgbClr val="14213D"/>
                 </a:solidFill>
                 <a:latin typeface="맑은 고딕"/>
+                <a:ea typeface="맑은 고딕"/>
+                <a:cs typeface="맑은 고딕"/>
               </a:rPr>
               <a:t>PART 01</a:t>
             </a:r>
@@ -9104,6 +9282,8 @@
                   <a:srgbClr val="FFFFFF"/>
                 </a:solidFill>
                 <a:latin typeface="맑은 고딕"/>
+                <a:ea typeface="맑은 고딕"/>
+                <a:cs typeface="맑은 고딕"/>
               </a:rPr>
               <a:t>클라우드 컴퓨팅이란?</a:t>
             </a:r>
@@ -9139,6 +9319,8 @@
                   <a:srgbClr val="C9D3E6"/>
                 </a:solidFill>
                 <a:latin typeface="맑은 고딕"/>
+                <a:ea typeface="맑은 고딕"/>
+                <a:cs typeface="맑은 고딕"/>
               </a:rPr>
               <a:t>On-Premise에서 Cloud로</a:t>
             </a:r>
@@ -9298,6 +9480,8 @@
                   <a:srgbClr val="14213D"/>
                 </a:solidFill>
                 <a:latin typeface="맑은 고딕"/>
+                <a:ea typeface="맑은 고딕"/>
+                <a:cs typeface="맑은 고딕"/>
               </a:rPr>
               <a:t>01</a:t>
             </a:r>
@@ -9333,6 +9517,8 @@
                   <a:srgbClr val="14B8A6"/>
                 </a:solidFill>
                 <a:latin typeface="맑은 고딕"/>
+                <a:ea typeface="맑은 고딕"/>
+                <a:cs typeface="맑은 고딕"/>
               </a:rPr>
               <a:t>PART 1 · 클라우드 컴퓨팅이란?</a:t>
             </a:r>
@@ -9368,6 +9554,8 @@
                   <a:srgbClr val="FFFFFF"/>
                 </a:solidFill>
                 <a:latin typeface="맑은 고딕"/>
+                <a:ea typeface="맑은 고딕"/>
+                <a:cs typeface="맑은 고딕"/>
               </a:rPr>
               <a:t>기존 온프레미스 방식의 한계</a:t>
             </a:r>
@@ -9407,6 +9595,8 @@
                   <a:srgbClr val="0D9488"/>
                 </a:solidFill>
                 <a:latin typeface="맑은 고딕"/>
+                <a:ea typeface="맑은 고딕"/>
+                <a:cs typeface="맑은 고딕"/>
               </a:rPr>
               <a:t>●  </a:t>
             </a:r>
@@ -9416,6 +9606,8 @@
                   <a:srgbClr val="222733"/>
                 </a:solidFill>
                 <a:latin typeface="맑은 고딕"/>
+                <a:ea typeface="맑은 고딕"/>
+                <a:cs typeface="맑은 고딕"/>
               </a:rPr>
               <a:t>서버를 </a:t>
             </a:r>
@@ -9425,6 +9617,8 @@
                   <a:srgbClr val="0D9488"/>
                 </a:solidFill>
                 <a:latin typeface="맑은 고딕"/>
+                <a:ea typeface="맑은 고딕"/>
+                <a:cs typeface="맑은 고딕"/>
               </a:rPr>
               <a:t>직접 구매·설치·운영</a:t>
             </a:r>
@@ -9441,6 +9635,8 @@
                   <a:srgbClr val="0D9488"/>
                 </a:solidFill>
                 <a:latin typeface="맑은 고딕"/>
+                <a:ea typeface="맑은 고딕"/>
+                <a:cs typeface="맑은 고딕"/>
               </a:rPr>
               <a:t>●  </a:t>
             </a:r>
@@ -9450,6 +9646,8 @@
                   <a:srgbClr val="222733"/>
                 </a:solidFill>
                 <a:latin typeface="맑은 고딕"/>
+                <a:ea typeface="맑은 고딕"/>
+                <a:cs typeface="맑은 고딕"/>
               </a:rPr>
               <a:t>장애 발생 시 </a:t>
             </a:r>
@@ -9459,6 +9657,8 @@
                   <a:srgbClr val="0D9488"/>
                 </a:solidFill>
                 <a:latin typeface="맑은 고딕"/>
+                <a:ea typeface="맑은 고딕"/>
+                <a:cs typeface="맑은 고딕"/>
               </a:rPr>
               <a:t>즉각 대응 어려움</a:t>
             </a:r>
@@ -9475,6 +9675,8 @@
                   <a:srgbClr val="0D9488"/>
                 </a:solidFill>
                 <a:latin typeface="맑은 고딕"/>
+                <a:ea typeface="맑은 고딕"/>
+                <a:cs typeface="맑은 고딕"/>
               </a:rPr>
               <a:t>●  </a:t>
             </a:r>
@@ -9484,6 +9686,8 @@
                   <a:srgbClr val="222733"/>
                 </a:solidFill>
                 <a:latin typeface="맑은 고딕"/>
+                <a:ea typeface="맑은 고딕"/>
+                <a:cs typeface="맑은 고딕"/>
               </a:rPr>
               <a:t>트래픽 급증에 </a:t>
             </a:r>
@@ -9493,6 +9697,8 @@
                   <a:srgbClr val="0D9488"/>
                 </a:solidFill>
                 <a:latin typeface="맑은 고딕"/>
+                <a:ea typeface="맑은 고딕"/>
+                <a:cs typeface="맑은 고딕"/>
               </a:rPr>
               <a:t>유연하게 대응 못함</a:t>
             </a:r>
@@ -9509,6 +9715,8 @@
                   <a:srgbClr val="0D9488"/>
                 </a:solidFill>
                 <a:latin typeface="맑은 고딕"/>
+                <a:ea typeface="맑은 고딕"/>
+                <a:cs typeface="맑은 고딕"/>
               </a:rPr>
               <a:t>●  </a:t>
             </a:r>
@@ -9518,6 +9726,8 @@
                   <a:srgbClr val="0D9488"/>
                 </a:solidFill>
                 <a:latin typeface="맑은 고딕"/>
+                <a:ea typeface="맑은 고딕"/>
+                <a:cs typeface="맑은 고딕"/>
               </a:rPr>
               <a:t>초기 투자 비용</a:t>
             </a:r>
@@ -9527,6 +9737,8 @@
                   <a:srgbClr val="222733"/>
                 </a:solidFill>
                 <a:latin typeface="맑은 고딕"/>
+                <a:ea typeface="맑은 고딕"/>
+                <a:cs typeface="맑은 고딕"/>
               </a:rPr>
               <a:t>이 큼</a:t>
             </a:r>
@@ -9562,6 +9774,8 @@
                   <a:srgbClr val="5B6373"/>
                 </a:solidFill>
                 <a:latin typeface="맑은 고딕"/>
+                <a:ea typeface="맑은 고딕"/>
+                <a:cs typeface="맑은 고딕"/>
               </a:rPr>
               <a:t>클라우드인프라관리  ·  1주차 1차시</a:t>
             </a:r>
@@ -9597,6 +9811,8 @@
                   <a:srgbClr val="5B6373"/>
                 </a:solidFill>
                 <a:latin typeface="맑은 고딕"/>
+                <a:ea typeface="맑은 고딕"/>
+                <a:cs typeface="맑은 고딕"/>
               </a:rPr>
               <a:t>05 / 14</a:t>
             </a:r>
@@ -9800,6 +10016,8 @@
                   <a:srgbClr val="14213D"/>
                 </a:solidFill>
                 <a:latin typeface="맑은 고딕"/>
+                <a:ea typeface="맑은 고딕"/>
+                <a:cs typeface="맑은 고딕"/>
               </a:rPr>
               <a:t>01</a:t>
             </a:r>
@@ -9835,6 +10053,8 @@
                   <a:srgbClr val="14B8A6"/>
                 </a:solidFill>
                 <a:latin typeface="맑은 고딕"/>
+                <a:ea typeface="맑은 고딕"/>
+                <a:cs typeface="맑은 고딕"/>
               </a:rPr>
               <a:t>PART 1 · 클라우드 컴퓨팅이란?</a:t>
             </a:r>
@@ -9870,6 +10090,8 @@
                   <a:srgbClr val="FFFFFF"/>
                 </a:solidFill>
                 <a:latin typeface="맑은 고딕"/>
+                <a:ea typeface="맑은 고딕"/>
+                <a:cs typeface="맑은 고딕"/>
               </a:rPr>
               <a:t>클라우드 컴퓨팅의 정의와 특징</a:t>
             </a:r>
@@ -9909,6 +10131,8 @@
                   <a:srgbClr val="0D9488"/>
                 </a:solidFill>
                 <a:latin typeface="맑은 고딕"/>
+                <a:ea typeface="맑은 고딕"/>
+                <a:cs typeface="맑은 고딕"/>
               </a:rPr>
               <a:t>●  </a:t>
             </a:r>
@@ -9918,6 +10142,8 @@
                   <a:srgbClr val="222733"/>
                 </a:solidFill>
                 <a:latin typeface="맑은 고딕"/>
+                <a:ea typeface="맑은 고딕"/>
+                <a:cs typeface="맑은 고딕"/>
               </a:rPr>
               <a:t>정의: 인터넷으로 </a:t>
             </a:r>
@@ -9927,6 +10153,8 @@
                   <a:srgbClr val="0D9488"/>
                 </a:solidFill>
                 <a:latin typeface="맑은 고딕"/>
+                <a:ea typeface="맑은 고딕"/>
+                <a:cs typeface="맑은 고딕"/>
               </a:rPr>
               <a:t>필요한 만큼 자원을 빌려쓰는 방식</a:t>
             </a:r>
@@ -9943,6 +10171,8 @@
                   <a:srgbClr val="222733"/>
                 </a:solidFill>
                 <a:latin typeface="맑은 고딕"/>
+                <a:ea typeface="맑은 고딕"/>
+                <a:cs typeface="맑은 고딕"/>
               </a:rPr>
               <a:t>① </a:t>
             </a:r>
@@ -9952,6 +10182,8 @@
                   <a:srgbClr val="0D9488"/>
                 </a:solidFill>
                 <a:latin typeface="맑은 고딕"/>
+                <a:ea typeface="맑은 고딕"/>
+                <a:cs typeface="맑은 고딕"/>
               </a:rPr>
               <a:t>온디맨드 셀프서비스</a:t>
             </a:r>
@@ -9968,6 +10200,8 @@
                   <a:srgbClr val="222733"/>
                 </a:solidFill>
                 <a:latin typeface="맑은 고딕"/>
+                <a:ea typeface="맑은 고딕"/>
+                <a:cs typeface="맑은 고딕"/>
               </a:rPr>
               <a:t>② </a:t>
             </a:r>
@@ -9977,6 +10211,8 @@
                   <a:srgbClr val="0D9488"/>
                 </a:solidFill>
                 <a:latin typeface="맑은 고딕"/>
+                <a:ea typeface="맑은 고딕"/>
+                <a:cs typeface="맑은 고딕"/>
               </a:rPr>
               <a:t>광범위한 네트워크 접근</a:t>
             </a:r>
@@ -9993,6 +10229,8 @@
                   <a:srgbClr val="222733"/>
                 </a:solidFill>
                 <a:latin typeface="맑은 고딕"/>
+                <a:ea typeface="맑은 고딕"/>
+                <a:cs typeface="맑은 고딕"/>
               </a:rPr>
               <a:t>③ </a:t>
             </a:r>
@@ -10002,6 +10240,8 @@
                   <a:srgbClr val="0D9488"/>
                 </a:solidFill>
                 <a:latin typeface="맑은 고딕"/>
+                <a:ea typeface="맑은 고딕"/>
+                <a:cs typeface="맑은 고딕"/>
               </a:rPr>
               <a:t>자원 풀링</a:t>
             </a:r>
@@ -10011,6 +10251,8 @@
                   <a:srgbClr val="222733"/>
                 </a:solidFill>
                 <a:latin typeface="맑은 고딕"/>
+                <a:ea typeface="맑은 고딕"/>
+                <a:cs typeface="맑은 고딕"/>
               </a:rPr>
               <a:t>(공유)</a:t>
             </a:r>
@@ -10027,6 +10269,8 @@
                   <a:srgbClr val="222733"/>
                 </a:solidFill>
                 <a:latin typeface="맑은 고딕"/>
+                <a:ea typeface="맑은 고딕"/>
+                <a:cs typeface="맑은 고딕"/>
               </a:rPr>
               <a:t>④ </a:t>
             </a:r>
@@ -10036,6 +10280,8 @@
                   <a:srgbClr val="0D9488"/>
                 </a:solidFill>
                 <a:latin typeface="맑은 고딕"/>
+                <a:ea typeface="맑은 고딕"/>
+                <a:cs typeface="맑은 고딕"/>
               </a:rPr>
               <a:t>신속한 확장성</a:t>
             </a:r>
@@ -10052,6 +10298,8 @@
                   <a:srgbClr val="222733"/>
                 </a:solidFill>
                 <a:latin typeface="맑은 고딕"/>
+                <a:ea typeface="맑은 고딕"/>
+                <a:cs typeface="맑은 고딕"/>
               </a:rPr>
               <a:t>⑤ </a:t>
             </a:r>
@@ -10061,6 +10309,8 @@
                   <a:srgbClr val="0D9488"/>
                 </a:solidFill>
                 <a:latin typeface="맑은 고딕"/>
+                <a:ea typeface="맑은 고딕"/>
+                <a:cs typeface="맑은 고딕"/>
               </a:rPr>
               <a:t>종량제 과금</a:t>
             </a:r>
@@ -10070,6 +10320,8 @@
                   <a:srgbClr val="222733"/>
                 </a:solidFill>
                 <a:latin typeface="맑은 고딕"/>
+                <a:ea typeface="맑은 고딕"/>
+                <a:cs typeface="맑은 고딕"/>
               </a:rPr>
               <a:t> (Pay-as-you-go)</a:t>
             </a:r>
@@ -10105,6 +10357,8 @@
                   <a:srgbClr val="5B6373"/>
                 </a:solidFill>
                 <a:latin typeface="맑은 고딕"/>
+                <a:ea typeface="맑은 고딕"/>
+                <a:cs typeface="맑은 고딕"/>
               </a:rPr>
               <a:t>클라우드인프라관리  ·  1주차 1차시</a:t>
             </a:r>
@@ -10140,6 +10394,8 @@
                   <a:srgbClr val="5B6373"/>
                 </a:solidFill>
                 <a:latin typeface="맑은 고딕"/>
+                <a:ea typeface="맑은 고딕"/>
+                <a:cs typeface="맑은 고딕"/>
               </a:rPr>
               <a:t>06 / 14</a:t>
             </a:r>
@@ -10343,6 +10599,8 @@
                   <a:srgbClr val="14213D"/>
                 </a:solidFill>
                 <a:latin typeface="맑은 고딕"/>
+                <a:ea typeface="맑은 고딕"/>
+                <a:cs typeface="맑은 고딕"/>
               </a:rPr>
               <a:t>01</a:t>
             </a:r>
@@ -10378,6 +10636,8 @@
                   <a:srgbClr val="14B8A6"/>
                 </a:solidFill>
                 <a:latin typeface="맑은 고딕"/>
+                <a:ea typeface="맑은 고딕"/>
+                <a:cs typeface="맑은 고딕"/>
               </a:rPr>
               <a:t>PART 1 · 클라우드 컴퓨팅이란?</a:t>
             </a:r>
@@ -10413,6 +10673,8 @@
                   <a:srgbClr val="FFFFFF"/>
                 </a:solidFill>
                 <a:latin typeface="맑은 고딕"/>
+                <a:ea typeface="맑은 고딕"/>
+                <a:cs typeface="맑은 고딕"/>
               </a:rPr>
               <a:t>온프레미스 vs 클라우드 비교</a:t>
             </a:r>
@@ -10492,6 +10754,8 @@
                   <a:srgbClr val="FFFFFF"/>
                 </a:solidFill>
                 <a:latin typeface="맑은 고딕"/>
+                <a:ea typeface="맑은 고딕"/>
+                <a:cs typeface="맑은 고딕"/>
               </a:rPr>
               <a:t>구분</a:t>
             </a:r>
@@ -10571,6 +10835,8 @@
                   <a:srgbClr val="FFFFFF"/>
                 </a:solidFill>
                 <a:latin typeface="맑은 고딕"/>
+                <a:ea typeface="맑은 고딕"/>
+                <a:cs typeface="맑은 고딕"/>
               </a:rPr>
               <a:t>온프레미스</a:t>
             </a:r>
@@ -10650,6 +10916,8 @@
                   <a:srgbClr val="FFFFFF"/>
                 </a:solidFill>
                 <a:latin typeface="맑은 고딕"/>
+                <a:ea typeface="맑은 고딕"/>
+                <a:cs typeface="맑은 고딕"/>
               </a:rPr>
               <a:t>클라우드</a:t>
             </a:r>
@@ -10729,6 +10997,8 @@
                   <a:srgbClr val="14213D"/>
                 </a:solidFill>
                 <a:latin typeface="맑은 고딕"/>
+                <a:ea typeface="맑은 고딕"/>
+                <a:cs typeface="맑은 고딕"/>
               </a:rPr>
               <a:t>초기 비용</a:t>
             </a:r>
@@ -10808,6 +11078,8 @@
                   <a:srgbClr val="222733"/>
                 </a:solidFill>
                 <a:latin typeface="맑은 고딕"/>
+                <a:ea typeface="맑은 고딕"/>
+                <a:cs typeface="맑은 고딕"/>
               </a:rPr>
               <a:t>높음 (서버·장비 구매)</a:t>
             </a:r>
@@ -10887,6 +11159,8 @@
                   <a:srgbClr val="222733"/>
                 </a:solidFill>
                 <a:latin typeface="맑은 고딕"/>
+                <a:ea typeface="맑은 고딕"/>
+                <a:cs typeface="맑은 고딕"/>
               </a:rPr>
               <a:t>낮음 (초기 투자 없음)</a:t>
             </a:r>
@@ -10966,6 +11240,8 @@
                   <a:srgbClr val="14213D"/>
                 </a:solidFill>
                 <a:latin typeface="맑은 고딕"/>
+                <a:ea typeface="맑은 고딕"/>
+                <a:cs typeface="맑은 고딕"/>
               </a:rPr>
               <a:t>확장성</a:t>
             </a:r>
@@ -11045,6 +11321,8 @@
                   <a:srgbClr val="222733"/>
                 </a:solidFill>
                 <a:latin typeface="맑은 고딕"/>
+                <a:ea typeface="맑은 고딕"/>
+                <a:cs typeface="맑은 고딕"/>
               </a:rPr>
               <a:t>제한적, 증설에 시간 소요</a:t>
             </a:r>
@@ -11124,6 +11402,8 @@
                   <a:srgbClr val="222733"/>
                 </a:solidFill>
                 <a:latin typeface="맑은 고딕"/>
+                <a:ea typeface="맑은 고딕"/>
+                <a:cs typeface="맑은 고딕"/>
               </a:rPr>
               <a:t>즉시 확장/축소 가능</a:t>
             </a:r>
@@ -11203,6 +11483,8 @@
                   <a:srgbClr val="14213D"/>
                 </a:solidFill>
                 <a:latin typeface="맑은 고딕"/>
+                <a:ea typeface="맑은 고딕"/>
+                <a:cs typeface="맑은 고딕"/>
               </a:rPr>
               <a:t>유지보수</a:t>
             </a:r>
@@ -11282,6 +11564,8 @@
                   <a:srgbClr val="222733"/>
                 </a:solidFill>
                 <a:latin typeface="맑은 고딕"/>
+                <a:ea typeface="맑은 고딕"/>
+                <a:cs typeface="맑은 고딕"/>
               </a:rPr>
               <a:t>자체 인력·시간 필요</a:t>
             </a:r>
@@ -11361,6 +11645,8 @@
                   <a:srgbClr val="222733"/>
                 </a:solidFill>
                 <a:latin typeface="맑은 고딕"/>
+                <a:ea typeface="맑은 고딕"/>
+                <a:cs typeface="맑은 고딕"/>
               </a:rPr>
               <a:t>클라우드 사업자가 관리</a:t>
             </a:r>
@@ -11440,6 +11726,8 @@
                   <a:srgbClr val="14213D"/>
                 </a:solidFill>
                 <a:latin typeface="맑은 고딕"/>
+                <a:ea typeface="맑은 고딕"/>
+                <a:cs typeface="맑은 고딕"/>
               </a:rPr>
               <a:t>장애 대응</a:t>
             </a:r>
@@ -11519,6 +11807,8 @@
                   <a:srgbClr val="222733"/>
                 </a:solidFill>
                 <a:latin typeface="맑은 고딕"/>
+                <a:ea typeface="맑은 고딕"/>
+                <a:cs typeface="맑은 고딕"/>
               </a:rPr>
               <a:t>직접 하드웨어 점검</a:t>
             </a:r>
@@ -11598,6 +11888,8 @@
                   <a:srgbClr val="222733"/>
                 </a:solidFill>
                 <a:latin typeface="맑은 고딕"/>
+                <a:ea typeface="맑은 고딕"/>
+                <a:cs typeface="맑은 고딕"/>
               </a:rPr>
               <a:t>자동 복구·이중화 지원</a:t>
             </a:r>
@@ -11677,6 +11969,8 @@
                   <a:srgbClr val="14213D"/>
                 </a:solidFill>
                 <a:latin typeface="맑은 고딕"/>
+                <a:ea typeface="맑은 고딕"/>
+                <a:cs typeface="맑은 고딕"/>
               </a:rPr>
               <a:t>과금 방식</a:t>
             </a:r>
@@ -11756,6 +12050,8 @@
                   <a:srgbClr val="222733"/>
                 </a:solidFill>
                 <a:latin typeface="맑은 고딕"/>
+                <a:ea typeface="맑은 고딕"/>
+                <a:cs typeface="맑은 고딕"/>
               </a:rPr>
               <a:t>고정 자산 투자</a:t>
             </a:r>
@@ -11835,6 +12131,8 @@
                   <a:srgbClr val="222733"/>
                 </a:solidFill>
                 <a:latin typeface="맑은 고딕"/>
+                <a:ea typeface="맑은 고딕"/>
+                <a:cs typeface="맑은 고딕"/>
               </a:rPr>
               <a:t>사용한 만큼 종량제</a:t>
             </a:r>
@@ -11870,6 +12168,8 @@
                   <a:srgbClr val="5B6373"/>
                 </a:solidFill>
                 <a:latin typeface="맑은 고딕"/>
+                <a:ea typeface="맑은 고딕"/>
+                <a:cs typeface="맑은 고딕"/>
               </a:rPr>
               <a:t>클라우드인프라관리  ·  1주차 1차시</a:t>
             </a:r>
@@ -11905,6 +12205,8 @@
                   <a:srgbClr val="5B6373"/>
                 </a:solidFill>
                 <a:latin typeface="맑은 고딕"/>
+                <a:ea typeface="맑은 고딕"/>
+                <a:cs typeface="맑은 고딕"/>
               </a:rPr>
               <a:t>07 / 14</a:t>
             </a:r>
@@ -12108,6 +12410,8 @@
                   <a:srgbClr val="14213D"/>
                 </a:solidFill>
                 <a:latin typeface="맑은 고딕"/>
+                <a:ea typeface="맑은 고딕"/>
+                <a:cs typeface="맑은 고딕"/>
               </a:rPr>
               <a:t>PART 02</a:t>
             </a:r>
@@ -12143,6 +12447,8 @@
                   <a:srgbClr val="FFFFFF"/>
                 </a:solidFill>
                 <a:latin typeface="맑은 고딕"/>
+                <a:ea typeface="맑은 고딕"/>
+                <a:cs typeface="맑은 고딕"/>
               </a:rPr>
               <a:t>가상화 기술</a:t>
             </a:r>
@@ -12178,6 +12484,8 @@
                   <a:srgbClr val="C9D3E6"/>
                 </a:solidFill>
                 <a:latin typeface="맑은 고딕"/>
+                <a:ea typeface="맑은 고딕"/>
+                <a:cs typeface="맑은 고딕"/>
               </a:rPr>
               <a:t>Hypervisor 기반 가상머신(VM)</a:t>
             </a:r>
@@ -12337,6 +12645,8 @@
                   <a:srgbClr val="14213D"/>
                 </a:solidFill>
                 <a:latin typeface="맑은 고딕"/>
+                <a:ea typeface="맑은 고딕"/>
+                <a:cs typeface="맑은 고딕"/>
               </a:rPr>
               <a:t>02</a:t>
             </a:r>
@@ -12372,6 +12682,8 @@
                   <a:srgbClr val="14B8A6"/>
                 </a:solidFill>
                 <a:latin typeface="맑은 고딕"/>
+                <a:ea typeface="맑은 고딕"/>
+                <a:cs typeface="맑은 고딕"/>
               </a:rPr>
               <a:t>PART 2 · 가상화 기술</a:t>
             </a:r>
@@ -12407,6 +12719,8 @@
                   <a:srgbClr val="FFFFFF"/>
                 </a:solidFill>
                 <a:latin typeface="맑은 고딕"/>
+                <a:ea typeface="맑은 고딕"/>
+                <a:cs typeface="맑은 고딕"/>
               </a:rPr>
               <a:t>가상화란? — Hypervisor 기반 VM 구조</a:t>
             </a:r>
@@ -12446,6 +12760,8 @@
                   <a:srgbClr val="0D9488"/>
                 </a:solidFill>
                 <a:latin typeface="맑은 고딕"/>
+                <a:ea typeface="맑은 고딕"/>
+                <a:cs typeface="맑은 고딕"/>
               </a:rPr>
               <a:t>●  </a:t>
             </a:r>
@@ -12455,6 +12771,8 @@
                   <a:srgbClr val="222733"/>
                 </a:solidFill>
                 <a:latin typeface="맑은 고딕"/>
+                <a:ea typeface="맑은 고딕"/>
+                <a:cs typeface="맑은 고딕"/>
               </a:rPr>
               <a:t>물리 서버 한 대를 </a:t>
             </a:r>
@@ -12464,6 +12782,8 @@
                   <a:srgbClr val="0D9488"/>
                 </a:solidFill>
                 <a:latin typeface="맑은 고딕"/>
+                <a:ea typeface="맑은 고딕"/>
+                <a:cs typeface="맑은 고딕"/>
               </a:rPr>
               <a:t>여러 대처럼 쪼개 쓰는 기술</a:t>
             </a:r>
@@ -12480,6 +12800,8 @@
                   <a:srgbClr val="0D9488"/>
                 </a:solidFill>
                 <a:latin typeface="맑은 고딕"/>
+                <a:ea typeface="맑은 고딕"/>
+                <a:cs typeface="맑은 고딕"/>
               </a:rPr>
               <a:t>●  </a:t>
             </a:r>
@@ -12489,6 +12811,8 @@
                   <a:srgbClr val="222733"/>
                 </a:solidFill>
                 <a:latin typeface="맑은 고딕"/>
+                <a:ea typeface="맑은 고딕"/>
+                <a:cs typeface="맑은 고딕"/>
               </a:rPr>
               <a:t>Hypervisor가 하드웨어 자원을 </a:t>
             </a:r>
@@ -12498,6 +12822,8 @@
                   <a:srgbClr val="0D9488"/>
                 </a:solidFill>
                 <a:latin typeface="맑은 고딕"/>
+                <a:ea typeface="맑은 고딕"/>
+                <a:cs typeface="맑은 고딕"/>
               </a:rPr>
               <a:t>나눠 각 VM에 배분</a:t>
             </a:r>
@@ -12514,6 +12840,8 @@
                   <a:srgbClr val="0D9488"/>
                 </a:solidFill>
                 <a:latin typeface="맑은 고딕"/>
+                <a:ea typeface="맑은 고딕"/>
+                <a:cs typeface="맑은 고딕"/>
               </a:rPr>
               <a:t>●  </a:t>
             </a:r>
@@ -12523,6 +12851,8 @@
                   <a:srgbClr val="222733"/>
                 </a:solidFill>
                 <a:latin typeface="맑은 고딕"/>
+                <a:ea typeface="맑은 고딕"/>
+                <a:cs typeface="맑은 고딕"/>
               </a:rPr>
               <a:t>VM마다 </a:t>
             </a:r>
@@ -12532,6 +12862,8 @@
                   <a:srgbClr val="0D9488"/>
                 </a:solidFill>
                 <a:latin typeface="맑은 고딕"/>
+                <a:ea typeface="맑은 고딕"/>
+                <a:cs typeface="맑은 고딕"/>
               </a:rPr>
               <a:t>자체 OS(Guest OS)를 통째로 가짐</a:t>
             </a:r>
@@ -12567,6 +12899,8 @@
                   <a:srgbClr val="14213D"/>
                 </a:solidFill>
                 <a:latin typeface="맑은 고딕"/>
+                <a:ea typeface="맑은 고딕"/>
+                <a:cs typeface="맑은 고딕"/>
               </a:rPr>
               <a:t>VM 구조</a:t>
             </a:r>
@@ -12646,6 +12980,8 @@
                   <a:srgbClr val="FFFFFF"/>
                 </a:solidFill>
                 <a:latin typeface="맑은 고딕"/>
+                <a:ea typeface="맑은 고딕"/>
+                <a:cs typeface="맑은 고딕"/>
               </a:rPr>
               <a:t>Guest OS + App</a:t>
             </a:r>
@@ -12725,6 +13061,8 @@
                   <a:srgbClr val="FFFFFF"/>
                 </a:solidFill>
                 <a:latin typeface="맑은 고딕"/>
+                <a:ea typeface="맑은 고딕"/>
+                <a:cs typeface="맑은 고딕"/>
               </a:rPr>
               <a:t>Guest OS + App</a:t>
             </a:r>
@@ -12804,6 +13142,8 @@
                   <a:srgbClr val="FFFFFF"/>
                 </a:solidFill>
                 <a:latin typeface="맑은 고딕"/>
+                <a:ea typeface="맑은 고딕"/>
+                <a:cs typeface="맑은 고딕"/>
               </a:rPr>
               <a:t>Guest OS + App</a:t>
             </a:r>
@@ -12883,6 +13223,8 @@
                   <a:srgbClr val="FFFFFF"/>
                 </a:solidFill>
                 <a:latin typeface="맑은 고딕"/>
+                <a:ea typeface="맑은 고딕"/>
+                <a:cs typeface="맑은 고딕"/>
               </a:rPr>
               <a:t>Hypervisor</a:t>
             </a:r>
@@ -12962,6 +13304,8 @@
                   <a:srgbClr val="FFFFFF"/>
                 </a:solidFill>
                 <a:latin typeface="맑은 고딕"/>
+                <a:ea typeface="맑은 고딕"/>
+                <a:cs typeface="맑은 고딕"/>
               </a:rPr>
               <a:t>Host OS / 물리 서버(Hardware)</a:t>
             </a:r>
@@ -12997,6 +13341,8 @@
                   <a:srgbClr val="5B6373"/>
                 </a:solidFill>
                 <a:latin typeface="맑은 고딕"/>
+                <a:ea typeface="맑은 고딕"/>
+                <a:cs typeface="맑은 고딕"/>
               </a:rPr>
               <a:t>클라우드인프라관리  ·  1주차 1차시</a:t>
             </a:r>
@@ -13032,6 +13378,8 @@
                   <a:srgbClr val="5B6373"/>
                 </a:solidFill>
                 <a:latin typeface="맑은 고딕"/>
+                <a:ea typeface="맑은 고딕"/>
+                <a:cs typeface="맑은 고딕"/>
               </a:rPr>
               <a:t>09 / 14</a:t>
             </a:r>

--- a/class/cloud_infra_mgmt/01주차_클라우드개념_Docker입문/01_강의자료/1차시_클라우드패러다임과가상화이론.pptx
+++ b/class/cloud_infra_mgmt/01주차_클라우드개념_Docker입문/01_강의자료/1차시_클라우드패러다임과가상화이론.pptx
@@ -6744,29 +6744,7 @@
                 <a:ea typeface="맑은 고딕"/>
                 <a:cs typeface="맑은 고딕"/>
               </a:rPr>
-              <a:t>●  </a:t>
-            </a:r>
-            <a:r>
-              <a:rPr sz="1700" b="1">
-                <a:solidFill>
-                  <a:srgbClr val="0D9488"/>
-                </a:solidFill>
-                <a:latin typeface="맑은 고딕"/>
-                <a:ea typeface="맑은 고딕"/>
-                <a:cs typeface="맑은 고딕"/>
-              </a:rPr>
-              <a:t>문제 발생 시</a:t>
-            </a:r>
-            <a:r>
-              <a:rPr sz="1700" b="0">
-                <a:solidFill>
-                  <a:srgbClr val="222733"/>
-                </a:solidFill>
-                <a:latin typeface="맑은 고딕"/>
-                <a:ea typeface="맑은 고딕"/>
-                <a:cs typeface="맑은 고딕"/>
-              </a:rPr>
-              <a:t> → 06_로컬VM_과제복습 / 07_오류FAQ 참고</a:t>
+              <a:t>●  문제 발생 시 → LMS Q&amp;A 게시판에 스크린샷과 함께 질문</a:t>
             </a:r>
           </a:p>
         </p:txBody>
